--- a/presentations/Day 3 - Foundations of Applied Machine Learning/5_baseline_ml_model_activity.pptx
+++ b/presentations/Day 3 - Foundations of Applied Machine Learning/5_baseline_ml_model_activity.pptx
@@ -5,7 +5,7 @@
     <p:sldMasterId id="2147483648" r:id="rId1"/>
   </p:sldMasterIdLst>
   <p:notesMasterIdLst>
-    <p:notesMasterId r:id="rId17"/>
+    <p:notesMasterId r:id="rId18"/>
   </p:notesMasterIdLst>
   <p:sldIdLst>
     <p:sldId id="256" r:id="rId2"/>
@@ -20,9 +20,10 @@
     <p:sldId id="266" r:id="rId11"/>
     <p:sldId id="267" r:id="rId12"/>
     <p:sldId id="268" r:id="rId13"/>
-    <p:sldId id="269" r:id="rId14"/>
-    <p:sldId id="270" r:id="rId15"/>
-    <p:sldId id="271" r:id="rId16"/>
+    <p:sldId id="273" r:id="rId14"/>
+    <p:sldId id="272" r:id="rId15"/>
+    <p:sldId id="270" r:id="rId16"/>
+    <p:sldId id="271" r:id="rId17"/>
   </p:sldIdLst>
   <p:sldSz cx="12192000" cy="6858000"/>
   <p:notesSz cx="6858000" cy="12192000"/>
@@ -592,7 +593,13 @@
   <p:cSld>
     <p:spTree>
       <p:nvGrpSpPr>
-        <p:cNvPr id="1" name=""/>
+        <p:cNvPr id="1" name="">
+          <a:extLst>
+            <a:ext uri="{FF2B5EF4-FFF2-40B4-BE49-F238E27FC236}">
+              <a16:creationId xmlns:a16="http://schemas.microsoft.com/office/drawing/2014/main" id="{D0305754-8DE9-F711-B781-27A395BF9962}"/>
+            </a:ext>
+          </a:extLst>
+        </p:cNvPr>
         <p:cNvGrpSpPr/>
         <p:nvPr/>
       </p:nvGrpSpPr>
@@ -606,7 +613,13 @@
       </p:grpSpPr>
       <p:sp>
         <p:nvSpPr>
-          <p:cNvPr id="2" name="Slide Image Placeholder 1"/>
+          <p:cNvPr id="2" name="Slide Image Placeholder 1">
+            <a:extLst>
+              <a:ext uri="{FF2B5EF4-FFF2-40B4-BE49-F238E27FC236}">
+                <a16:creationId xmlns:a16="http://schemas.microsoft.com/office/drawing/2014/main" id="{DCA82290-116A-887E-A9DE-773EECA11B59}"/>
+              </a:ext>
+            </a:extLst>
+          </p:cNvPr>
           <p:cNvSpPr>
             <a:spLocks noGrp="1" noRot="1" noChangeAspect="1"/>
           </p:cNvSpPr>
@@ -618,7 +631,13 @@
       </p:sp>
       <p:sp>
         <p:nvSpPr>
-          <p:cNvPr id="3" name="Notes Placeholder 2"/>
+          <p:cNvPr id="3" name="Notes Placeholder 2">
+            <a:extLst>
+              <a:ext uri="{FF2B5EF4-FFF2-40B4-BE49-F238E27FC236}">
+                <a16:creationId xmlns:a16="http://schemas.microsoft.com/office/drawing/2014/main" id="{DD148C46-2062-08F5-DECF-7EC0FD6A8914}"/>
+              </a:ext>
+            </a:extLst>
+          </p:cNvPr>
           <p:cNvSpPr>
             <a:spLocks noGrp="1"/>
           </p:cNvSpPr>
@@ -637,7 +656,13 @@
       </p:sp>
       <p:sp>
         <p:nvSpPr>
-          <p:cNvPr id="4" name="Slide Number Placeholder 3"/>
+          <p:cNvPr id="4" name="Slide Number Placeholder 3">
+            <a:extLst>
+              <a:ext uri="{FF2B5EF4-FFF2-40B4-BE49-F238E27FC236}">
+                <a16:creationId xmlns:a16="http://schemas.microsoft.com/office/drawing/2014/main" id="{C2ECCBA0-A03F-7982-AAB3-BA277AE25754}"/>
+              </a:ext>
+            </a:extLst>
+          </p:cNvPr>
           <p:cNvSpPr>
             <a:spLocks noGrp="1"/>
           </p:cNvSpPr>
@@ -661,7 +686,7 @@
     </p:spTree>
     <p:extLst>
       <p:ext uri="{BB962C8B-B14F-4D97-AF65-F5344CB8AC3E}">
-        <p14:creationId xmlns:p14="http://schemas.microsoft.com/office/powerpoint/2010/main" val="1024086991"/>
+        <p14:creationId xmlns:p14="http://schemas.microsoft.com/office/powerpoint/2010/main" val="2666387752"/>
       </p:ext>
     </p:extLst>
   </p:cSld>
@@ -676,7 +701,13 @@
   <p:cSld>
     <p:spTree>
       <p:nvGrpSpPr>
-        <p:cNvPr id="1" name=""/>
+        <p:cNvPr id="1" name="">
+          <a:extLst>
+            <a:ext uri="{FF2B5EF4-FFF2-40B4-BE49-F238E27FC236}">
+              <a16:creationId xmlns:a16="http://schemas.microsoft.com/office/drawing/2014/main" id="{39A536E2-09A4-F5B3-E105-6220F603C422}"/>
+            </a:ext>
+          </a:extLst>
+        </p:cNvPr>
         <p:cNvGrpSpPr/>
         <p:nvPr/>
       </p:nvGrpSpPr>
@@ -690,7 +721,13 @@
       </p:grpSpPr>
       <p:sp>
         <p:nvSpPr>
-          <p:cNvPr id="2" name="Slide Image Placeholder 1"/>
+          <p:cNvPr id="2" name="Slide Image Placeholder 1">
+            <a:extLst>
+              <a:ext uri="{FF2B5EF4-FFF2-40B4-BE49-F238E27FC236}">
+                <a16:creationId xmlns:a16="http://schemas.microsoft.com/office/drawing/2014/main" id="{8CD85F85-BA25-1F2D-E2F7-35DF3BD9941C}"/>
+              </a:ext>
+            </a:extLst>
+          </p:cNvPr>
           <p:cNvSpPr>
             <a:spLocks noGrp="1" noRot="1" noChangeAspect="1"/>
           </p:cNvSpPr>
@@ -702,7 +739,13 @@
       </p:sp>
       <p:sp>
         <p:nvSpPr>
-          <p:cNvPr id="3" name="Notes Placeholder 2"/>
+          <p:cNvPr id="3" name="Notes Placeholder 2">
+            <a:extLst>
+              <a:ext uri="{FF2B5EF4-FFF2-40B4-BE49-F238E27FC236}">
+                <a16:creationId xmlns:a16="http://schemas.microsoft.com/office/drawing/2014/main" id="{2DF59608-E0C3-9579-A693-03205510CCCC}"/>
+              </a:ext>
+            </a:extLst>
+          </p:cNvPr>
           <p:cNvSpPr>
             <a:spLocks noGrp="1"/>
           </p:cNvSpPr>
@@ -721,7 +764,13 @@
       </p:sp>
       <p:sp>
         <p:nvSpPr>
-          <p:cNvPr id="4" name="Slide Number Placeholder 3"/>
+          <p:cNvPr id="4" name="Slide Number Placeholder 3">
+            <a:extLst>
+              <a:ext uri="{FF2B5EF4-FFF2-40B4-BE49-F238E27FC236}">
+                <a16:creationId xmlns:a16="http://schemas.microsoft.com/office/drawing/2014/main" id="{A9AAE80A-C38E-18AF-210F-213E5328E458}"/>
+              </a:ext>
+            </a:extLst>
+          </p:cNvPr>
           <p:cNvSpPr>
             <a:spLocks noGrp="1"/>
           </p:cNvSpPr>
@@ -745,7 +794,7 @@
     </p:spTree>
     <p:extLst>
       <p:ext uri="{BB962C8B-B14F-4D97-AF65-F5344CB8AC3E}">
-        <p14:creationId xmlns:p14="http://schemas.microsoft.com/office/powerpoint/2010/main" val="1024086991"/>
+        <p14:creationId xmlns:p14="http://schemas.microsoft.com/office/powerpoint/2010/main" val="3283354982"/>
       </p:ext>
     </p:extLst>
   </p:cSld>
@@ -821,6 +870,90 @@
             <a:fld id="{F7021451-1387-4CA6-816F-3879F97B5CBC}" type="slidenum">
               <a:rPr lang="en-US"/>
               <a:t>15</a:t>
+            </a:fld>
+            <a:endParaRPr lang="en-US"/>
+          </a:p>
+        </p:txBody>
+      </p:sp>
+    </p:spTree>
+    <p:extLst>
+      <p:ext uri="{BB962C8B-B14F-4D97-AF65-F5344CB8AC3E}">
+        <p14:creationId xmlns:p14="http://schemas.microsoft.com/office/powerpoint/2010/main" val="1024086991"/>
+      </p:ext>
+    </p:extLst>
+  </p:cSld>
+  <p:clrMapOvr>
+    <a:masterClrMapping/>
+  </p:clrMapOvr>
+</p:notes>
+</file>
+
+<file path=ppt/notesSlides/notesSlide16.xml><?xml version="1.0" encoding="utf-8"?>
+<p:notes xmlns:a="http://schemas.openxmlformats.org/drawingml/2006/main" xmlns:r="http://schemas.openxmlformats.org/officeDocument/2006/relationships" xmlns:p="http://schemas.openxmlformats.org/presentationml/2006/main">
+  <p:cSld>
+    <p:spTree>
+      <p:nvGrpSpPr>
+        <p:cNvPr id="1" name=""/>
+        <p:cNvGrpSpPr/>
+        <p:nvPr/>
+      </p:nvGrpSpPr>
+      <p:grpSpPr>
+        <a:xfrm>
+          <a:off x="0" y="0"/>
+          <a:ext cx="0" cy="0"/>
+          <a:chOff x="0" y="0"/>
+          <a:chExt cx="0" cy="0"/>
+        </a:xfrm>
+      </p:grpSpPr>
+      <p:sp>
+        <p:nvSpPr>
+          <p:cNvPr id="2" name="Slide Image Placeholder 1"/>
+          <p:cNvSpPr>
+            <a:spLocks noGrp="1" noRot="1" noChangeAspect="1"/>
+          </p:cNvSpPr>
+          <p:nvPr>
+            <p:ph type="sldImg"/>
+          </p:nvPr>
+        </p:nvSpPr>
+        <p:spPr/>
+      </p:sp>
+      <p:sp>
+        <p:nvSpPr>
+          <p:cNvPr id="3" name="Notes Placeholder 2"/>
+          <p:cNvSpPr>
+            <a:spLocks noGrp="1"/>
+          </p:cNvSpPr>
+          <p:nvPr>
+            <p:ph type="body" idx="1"/>
+          </p:nvPr>
+        </p:nvSpPr>
+        <p:spPr/>
+        <p:txBody>
+          <a:bodyPr/>
+          <a:lstStyle/>
+          <a:p>
+            <a:endParaRPr lang="en-US" dirty="0"/>
+          </a:p>
+        </p:txBody>
+      </p:sp>
+      <p:sp>
+        <p:nvSpPr>
+          <p:cNvPr id="4" name="Slide Number Placeholder 3"/>
+          <p:cNvSpPr>
+            <a:spLocks noGrp="1"/>
+          </p:cNvSpPr>
+          <p:nvPr>
+            <p:ph type="sldNum" sz="quarter" idx="10"/>
+          </p:nvPr>
+        </p:nvSpPr>
+        <p:spPr/>
+        <p:txBody>
+          <a:bodyPr/>
+          <a:lstStyle/>
+          <a:p>
+            <a:fld id="{F7021451-1387-4CA6-816F-3879F97B5CBC}" type="slidenum">
+              <a:rPr lang="en-US"/>
+              <a:t>16</a:t>
             </a:fld>
             <a:endParaRPr lang="en-US"/>
           </a:p>
@@ -5264,7 +5397,7 @@
 
 <file path=ppt/slides/slide13.xml><?xml version="1.0" encoding="utf-8"?>
 <p:sld xmlns:a="http://schemas.openxmlformats.org/drawingml/2006/main" xmlns:r="http://schemas.openxmlformats.org/officeDocument/2006/relationships" xmlns:p="http://schemas.openxmlformats.org/presentationml/2006/main">
-  <p:cSld name="Slide 14">
+  <p:cSld>
     <p:bg>
       <p:bgPr>
         <a:solidFill>
@@ -5275,7 +5408,13 @@
     </p:bg>
     <p:spTree>
       <p:nvGrpSpPr>
-        <p:cNvPr id="1" name=""/>
+        <p:cNvPr id="1" name="">
+          <a:extLst>
+            <a:ext uri="{FF2B5EF4-FFF2-40B4-BE49-F238E27FC236}">
+              <a16:creationId xmlns:a16="http://schemas.microsoft.com/office/drawing/2014/main" id="{965B3479-7140-8B17-EB80-57D396278659}"/>
+            </a:ext>
+          </a:extLst>
+        </p:cNvPr>
         <p:cNvGrpSpPr/>
         <p:nvPr/>
       </p:nvGrpSpPr>
@@ -5289,7 +5428,13 @@
       </p:grpSpPr>
       <p:sp>
         <p:nvSpPr>
-          <p:cNvPr id="2" name="Shape 0"/>
+          <p:cNvPr id="2" name="Shape 0">
+            <a:extLst>
+              <a:ext uri="{FF2B5EF4-FFF2-40B4-BE49-F238E27FC236}">
+                <a16:creationId xmlns:a16="http://schemas.microsoft.com/office/drawing/2014/main" id="{E25FF1EA-730B-522D-8B4D-D4F5BC76A1AC}"/>
+              </a:ext>
+            </a:extLst>
+          </p:cNvPr>
           <p:cNvSpPr/>
           <p:nvPr/>
         </p:nvSpPr>
@@ -5323,7 +5468,13 @@
       </p:sp>
       <p:sp>
         <p:nvSpPr>
-          <p:cNvPr id="3" name="Text 1"/>
+          <p:cNvPr id="3" name="Text 1">
+            <a:extLst>
+              <a:ext uri="{FF2B5EF4-FFF2-40B4-BE49-F238E27FC236}">
+                <a16:creationId xmlns:a16="http://schemas.microsoft.com/office/drawing/2014/main" id="{20CBC651-59B7-7B3C-F659-196067D70FA0}"/>
+              </a:ext>
+            </a:extLst>
+          </p:cNvPr>
           <p:cNvSpPr/>
           <p:nvPr/>
         </p:nvSpPr>
@@ -5362,48 +5513,13 @@
       </p:sp>
       <p:sp>
         <p:nvSpPr>
-          <p:cNvPr id="4" name="Text 2"/>
-          <p:cNvSpPr/>
-          <p:nvPr/>
-        </p:nvSpPr>
-        <p:spPr>
-          <a:xfrm>
-            <a:off x="502920" y="621792"/>
-            <a:ext cx="8961120" cy="475488"/>
-          </a:xfrm>
-          <a:prstGeom prst="rect">
-            <a:avLst/>
-          </a:prstGeom>
-          <a:noFill/>
-          <a:ln/>
-        </p:spPr>
-        <p:txBody>
-          <a:bodyPr wrap="square" lIns="0" tIns="0" rIns="0" bIns="0" rtlCol="0" anchor="ctr">
-            <a:normAutofit/>
-          </a:bodyPr>
-          <a:lstStyle/>
-          <a:p>
-            <a:pPr marL="0" indent="0">
-              <a:buNone/>
-            </a:pPr>
-            <a:r>
-              <a:rPr lang="en-US" sz="2400" b="1" dirty="0">
-                <a:solidFill>
-                  <a:srgbClr val="1F2937"/>
-                </a:solidFill>
-                <a:latin typeface="Aptos Display" pitchFamily="34" charset="0"/>
-                <a:ea typeface="Aptos Display" pitchFamily="34" charset="-122"/>
-                <a:cs typeface="Aptos Display" pitchFamily="34" charset="-120"/>
-              </a:rPr>
-              <a:t>Participant output: first-pass model card</a:t>
-            </a:r>
-            <a:endParaRPr lang="en-US" sz="2400" dirty="0"/>
-          </a:p>
-        </p:txBody>
-      </p:sp>
-      <p:sp>
-        <p:nvSpPr>
-          <p:cNvPr id="5" name="Text 3"/>
+          <p:cNvPr id="5" name="Text 3">
+            <a:extLst>
+              <a:ext uri="{FF2B5EF4-FFF2-40B4-BE49-F238E27FC236}">
+                <a16:creationId xmlns:a16="http://schemas.microsoft.com/office/drawing/2014/main" id="{44254A0F-4E4D-6434-5740-5CA4B54317F6}"/>
+              </a:ext>
+            </a:extLst>
+          </p:cNvPr>
           <p:cNvSpPr/>
           <p:nvPr/>
         </p:nvSpPr>
@@ -5439,51 +5555,19 @@
       </p:sp>
       <p:sp>
         <p:nvSpPr>
-          <p:cNvPr id="6" name="Text 4"/>
-          <p:cNvSpPr/>
-          <p:nvPr/>
-        </p:nvSpPr>
-        <p:spPr>
-          <a:xfrm>
-            <a:off x="777240" y="1207008"/>
-            <a:ext cx="10332720" cy="384048"/>
-          </a:xfrm>
-          <a:prstGeom prst="rect">
-            <a:avLst/>
-          </a:prstGeom>
-          <a:noFill/>
-          <a:ln/>
-        </p:spPr>
-        <p:txBody>
-          <a:bodyPr wrap="square" lIns="254" tIns="254" rIns="254" bIns="254" rtlCol="0" anchor="t">
-            <a:normAutofit/>
-          </a:bodyPr>
-          <a:lstStyle/>
-          <a:p>
-            <a:pPr marL="0" indent="0" algn="l">
-              <a:buNone/>
-            </a:pPr>
-            <a:r>
-              <a:rPr lang="en-US" sz="1800" b="1" dirty="0">
-                <a:solidFill>
-                  <a:srgbClr val="1F2937"/>
-                </a:solidFill>
-              </a:rPr>
-              <a:t>Each group should leave with a short model card summarizing the baseline analysis.</a:t>
-            </a:r>
-            <a:endParaRPr lang="en-US" sz="1800" dirty="0"/>
-          </a:p>
-        </p:txBody>
-      </p:sp>
-      <p:sp>
-        <p:nvSpPr>
-          <p:cNvPr id="7" name="Shape 5"/>
-          <p:cNvSpPr/>
-          <p:nvPr/>
-        </p:nvSpPr>
-        <p:spPr>
-          <a:xfrm>
-            <a:off x="868680" y="1828800"/>
+          <p:cNvPr id="9" name="Shape 7">
+            <a:extLst>
+              <a:ext uri="{FF2B5EF4-FFF2-40B4-BE49-F238E27FC236}">
+                <a16:creationId xmlns:a16="http://schemas.microsoft.com/office/drawing/2014/main" id="{C4F55C01-8EC8-3B35-2ED2-D3518227FB7B}"/>
+              </a:ext>
+            </a:extLst>
+          </p:cNvPr>
+          <p:cNvSpPr/>
+          <p:nvPr/>
+        </p:nvSpPr>
+        <p:spPr>
+          <a:xfrm>
+            <a:off x="6217920" y="1828800"/>
             <a:ext cx="4709160" cy="713232"/>
           </a:xfrm>
           <a:prstGeom prst="roundRect">
@@ -5511,65 +5595,19 @@
       </p:sp>
       <p:sp>
         <p:nvSpPr>
-          <p:cNvPr id="8" name="Text 6"/>
-          <p:cNvSpPr/>
-          <p:nvPr/>
-        </p:nvSpPr>
-        <p:spPr>
-          <a:xfrm>
-            <a:off x="1033272" y="1947672"/>
-            <a:ext cx="4379976" cy="512064"/>
-          </a:xfrm>
-          <a:prstGeom prst="rect">
-            <a:avLst/>
-          </a:prstGeom>
-          <a:noFill/>
-          <a:ln/>
-        </p:spPr>
-        <p:txBody>
-          <a:bodyPr wrap="square" lIns="254" tIns="254" rIns="254" bIns="254" rtlCol="0" anchor="ctr">
-            <a:normAutofit/>
-          </a:bodyPr>
-          <a:lstStyle/>
-          <a:p>
-            <a:pPr marL="0" indent="0" algn="l">
-              <a:buNone/>
-            </a:pPr>
-            <a:r>
-              <a:rPr lang="en-US" sz="1380" b="1" dirty="0">
-                <a:solidFill>
-                  <a:srgbClr val="1F2937"/>
-                </a:solidFill>
-              </a:rPr>
-              <a:t>Problem statement</a:t>
-            </a:r>
-            <a:endParaRPr lang="en-US" sz="1380" dirty="0"/>
-          </a:p>
-          <a:p>
-            <a:pPr marL="0" indent="0" algn="l">
-              <a:buNone/>
-            </a:pPr>
-            <a:r>
-              <a:rPr lang="en-US" sz="1380" b="1" dirty="0">
-                <a:solidFill>
-                  <a:srgbClr val="1F2937"/>
-                </a:solidFill>
-              </a:rPr>
-              <a:t>What is predicted, for whom or what, and why?</a:t>
-            </a:r>
-            <a:endParaRPr lang="en-US" sz="1380" dirty="0"/>
-          </a:p>
-        </p:txBody>
-      </p:sp>
-      <p:sp>
-        <p:nvSpPr>
-          <p:cNvPr id="9" name="Shape 7"/>
-          <p:cNvSpPr/>
-          <p:nvPr/>
-        </p:nvSpPr>
-        <p:spPr>
-          <a:xfrm>
-            <a:off x="6217920" y="1828800"/>
+          <p:cNvPr id="13" name="Shape 11">
+            <a:extLst>
+              <a:ext uri="{FF2B5EF4-FFF2-40B4-BE49-F238E27FC236}">
+                <a16:creationId xmlns:a16="http://schemas.microsoft.com/office/drawing/2014/main" id="{A51A6403-5B1E-3145-540E-4AD48B91CF83}"/>
+              </a:ext>
+            </a:extLst>
+          </p:cNvPr>
+          <p:cNvSpPr/>
+          <p:nvPr/>
+        </p:nvSpPr>
+        <p:spPr>
+          <a:xfrm>
+            <a:off x="6217920" y="2834640"/>
             <a:ext cx="4709160" cy="713232"/>
           </a:xfrm>
           <a:prstGeom prst="roundRect">
@@ -5597,65 +5635,19 @@
       </p:sp>
       <p:sp>
         <p:nvSpPr>
-          <p:cNvPr id="10" name="Text 8"/>
-          <p:cNvSpPr/>
-          <p:nvPr/>
-        </p:nvSpPr>
-        <p:spPr>
-          <a:xfrm>
-            <a:off x="6382512" y="1947672"/>
-            <a:ext cx="4379976" cy="512064"/>
-          </a:xfrm>
-          <a:prstGeom prst="rect">
-            <a:avLst/>
-          </a:prstGeom>
-          <a:noFill/>
-          <a:ln/>
-        </p:spPr>
-        <p:txBody>
-          <a:bodyPr wrap="square" lIns="254" tIns="254" rIns="254" bIns="254" rtlCol="0" anchor="ctr">
-            <a:normAutofit fontScale="92500" lnSpcReduction="20000"/>
-          </a:bodyPr>
-          <a:lstStyle/>
-          <a:p>
-            <a:pPr marL="0" indent="0" algn="l">
-              <a:buNone/>
-            </a:pPr>
-            <a:r>
-              <a:rPr lang="en-US" sz="1380" b="1" dirty="0">
-                <a:solidFill>
-                  <a:srgbClr val="1F2937"/>
-                </a:solidFill>
-              </a:rPr>
-              <a:t>Dataset</a:t>
-            </a:r>
-            <a:endParaRPr lang="en-US" sz="1380" dirty="0"/>
-          </a:p>
-          <a:p>
-            <a:pPr marL="0" indent="0" algn="l">
-              <a:buNone/>
-            </a:pPr>
-            <a:r>
-              <a:rPr lang="en-US" sz="1380" b="1" dirty="0">
-                <a:solidFill>
-                  <a:srgbClr val="1F2937"/>
-                </a:solidFill>
-              </a:rPr>
-              <a:t>Rows, variables, target, missing values, and leakage concerns</a:t>
-            </a:r>
-            <a:endParaRPr lang="en-US" sz="1380" dirty="0"/>
-          </a:p>
-        </p:txBody>
-      </p:sp>
-      <p:sp>
-        <p:nvSpPr>
-          <p:cNvPr id="11" name="Shape 9"/>
-          <p:cNvSpPr/>
-          <p:nvPr/>
-        </p:nvSpPr>
-        <p:spPr>
-          <a:xfrm>
-            <a:off x="868680" y="2834640"/>
+          <p:cNvPr id="17" name="Shape 15">
+            <a:extLst>
+              <a:ext uri="{FF2B5EF4-FFF2-40B4-BE49-F238E27FC236}">
+                <a16:creationId xmlns:a16="http://schemas.microsoft.com/office/drawing/2014/main" id="{2C1E2CBF-28F2-2320-FC0D-4DC61A5324BE}"/>
+              </a:ext>
+            </a:extLst>
+          </p:cNvPr>
+          <p:cNvSpPr/>
+          <p:nvPr/>
+        </p:nvSpPr>
+        <p:spPr>
+          <a:xfrm>
+            <a:off x="6217920" y="3840480"/>
             <a:ext cx="4709160" cy="713232"/>
           </a:xfrm>
           <a:prstGeom prst="roundRect">
@@ -5683,14 +5675,1275 @@
       </p:sp>
       <p:sp>
         <p:nvSpPr>
-          <p:cNvPr id="12" name="Text 10"/>
-          <p:cNvSpPr/>
-          <p:nvPr/>
-        </p:nvSpPr>
-        <p:spPr>
-          <a:xfrm>
-            <a:off x="1033272" y="2953512"/>
-            <a:ext cx="4379976" cy="512064"/>
+          <p:cNvPr id="19" name="Text 17">
+            <a:extLst>
+              <a:ext uri="{FF2B5EF4-FFF2-40B4-BE49-F238E27FC236}">
+                <a16:creationId xmlns:a16="http://schemas.microsoft.com/office/drawing/2014/main" id="{93517CC1-A114-5A01-D961-3C3AF18E2A34}"/>
+              </a:ext>
+            </a:extLst>
+          </p:cNvPr>
+          <p:cNvSpPr/>
+          <p:nvPr/>
+        </p:nvSpPr>
+        <p:spPr>
+          <a:xfrm>
+            <a:off x="11539728" y="6446520"/>
+            <a:ext cx="274320" cy="182880"/>
+          </a:xfrm>
+          <a:prstGeom prst="rect">
+            <a:avLst/>
+          </a:prstGeom>
+          <a:noFill/>
+          <a:ln/>
+        </p:spPr>
+        <p:txBody>
+          <a:bodyPr wrap="square" lIns="0" tIns="0" rIns="0" bIns="0" rtlCol="0" anchor="ctr"/>
+          <a:lstStyle/>
+          <a:p>
+            <a:pPr marL="0" indent="0" algn="r">
+              <a:buNone/>
+            </a:pPr>
+            <a:r>
+              <a:rPr lang="en-US" sz="800" dirty="0">
+                <a:solidFill>
+                  <a:srgbClr val="9CA3AF"/>
+                </a:solidFill>
+              </a:rPr>
+              <a:t>14</a:t>
+            </a:r>
+            <a:endParaRPr lang="en-US" sz="800" dirty="0"/>
+          </a:p>
+        </p:txBody>
+      </p:sp>
+      <p:sp>
+        <p:nvSpPr>
+          <p:cNvPr id="6" name="Text 0">
+            <a:extLst>
+              <a:ext uri="{FF2B5EF4-FFF2-40B4-BE49-F238E27FC236}">
+                <a16:creationId xmlns:a16="http://schemas.microsoft.com/office/drawing/2014/main" id="{7CA0F78D-4437-1537-A652-2473CC37F945}"/>
+              </a:ext>
+            </a:extLst>
+          </p:cNvPr>
+          <p:cNvSpPr/>
+          <p:nvPr/>
+        </p:nvSpPr>
+        <p:spPr>
+          <a:xfrm>
+            <a:off x="612648" y="859536"/>
+            <a:ext cx="10789920" cy="457200"/>
+          </a:xfrm>
+          <a:prstGeom prst="rect">
+            <a:avLst/>
+          </a:prstGeom>
+          <a:noFill/>
+          <a:ln/>
+        </p:spPr>
+        <p:txBody>
+          <a:bodyPr wrap="square" lIns="0" tIns="0" rIns="0" bIns="0" rtlCol="0" anchor="ctr">
+            <a:normAutofit/>
+          </a:bodyPr>
+          <a:lstStyle/>
+          <a:p>
+            <a:pPr marL="0" indent="0">
+              <a:buNone/>
+            </a:pPr>
+            <a:r>
+              <a:rPr lang="en-US" sz="2500" b="1" dirty="0">
+                <a:solidFill>
+                  <a:srgbClr val="12355B"/>
+                </a:solidFill>
+                <a:latin typeface="Aptos Display" pitchFamily="34" charset="0"/>
+                <a:ea typeface="Aptos Display" pitchFamily="34" charset="-122"/>
+                <a:cs typeface="Aptos Display" pitchFamily="34" charset="-120"/>
+              </a:rPr>
+              <a:t>Session 5 technical skill: complete baseline modeling workflow</a:t>
+            </a:r>
+            <a:endParaRPr lang="en-US" sz="2500" dirty="0"/>
+          </a:p>
+        </p:txBody>
+      </p:sp>
+      <p:sp>
+        <p:nvSpPr>
+          <p:cNvPr id="8" name="Text 1">
+            <a:extLst>
+              <a:ext uri="{FF2B5EF4-FFF2-40B4-BE49-F238E27FC236}">
+                <a16:creationId xmlns:a16="http://schemas.microsoft.com/office/drawing/2014/main" id="{0BAAD2E2-644F-9A87-9CF8-AD104EBE1E87}"/>
+              </a:ext>
+            </a:extLst>
+          </p:cNvPr>
+          <p:cNvSpPr/>
+          <p:nvPr/>
+        </p:nvSpPr>
+        <p:spPr>
+          <a:xfrm>
+            <a:off x="630936" y="1380744"/>
+            <a:ext cx="10241280" cy="320040"/>
+          </a:xfrm>
+          <a:prstGeom prst="rect">
+            <a:avLst/>
+          </a:prstGeom>
+          <a:noFill/>
+          <a:ln/>
+        </p:spPr>
+        <p:txBody>
+          <a:bodyPr wrap="square" lIns="0" tIns="0" rIns="0" bIns="0" rtlCol="0" anchor="ctr">
+            <a:normAutofit/>
+          </a:bodyPr>
+          <a:lstStyle/>
+          <a:p>
+            <a:pPr marL="0" indent="0">
+              <a:buNone/>
+            </a:pPr>
+            <a:r>
+              <a:rPr lang="en-US" sz="1150" dirty="0">
+                <a:solidFill>
+                  <a:srgbClr val="4B5563"/>
+                </a:solidFill>
+              </a:rPr>
+              <a:t>Goal: combine the tool skills into one repeatable applied ML workflow.</a:t>
+            </a:r>
+            <a:endParaRPr lang="en-US" sz="1150" dirty="0"/>
+          </a:p>
+        </p:txBody>
+      </p:sp>
+      <p:sp>
+        <p:nvSpPr>
+          <p:cNvPr id="11" name="Shape 2">
+            <a:extLst>
+              <a:ext uri="{FF2B5EF4-FFF2-40B4-BE49-F238E27FC236}">
+                <a16:creationId xmlns:a16="http://schemas.microsoft.com/office/drawing/2014/main" id="{95D6381A-794F-0809-87F8-197A30909B19}"/>
+              </a:ext>
+            </a:extLst>
+          </p:cNvPr>
+          <p:cNvSpPr/>
+          <p:nvPr/>
+        </p:nvSpPr>
+        <p:spPr>
+          <a:xfrm>
+            <a:off x="841248" y="2048256"/>
+            <a:ext cx="621792" cy="621792"/>
+          </a:xfrm>
+          <a:prstGeom prst="ellipse">
+            <a:avLst/>
+          </a:prstGeom>
+          <a:solidFill>
+            <a:srgbClr val="2F80ED"/>
+          </a:solidFill>
+          <a:ln w="12700">
+            <a:solidFill>
+              <a:srgbClr val="2F80ED"/>
+            </a:solidFill>
+            <a:prstDash val="solid"/>
+          </a:ln>
+        </p:spPr>
+        <p:txBody>
+          <a:bodyPr/>
+          <a:lstStyle/>
+          <a:p>
+            <a:endParaRPr lang="en-US"/>
+          </a:p>
+        </p:txBody>
+      </p:sp>
+      <p:sp>
+        <p:nvSpPr>
+          <p:cNvPr id="14" name="Text 3">
+            <a:extLst>
+              <a:ext uri="{FF2B5EF4-FFF2-40B4-BE49-F238E27FC236}">
+                <a16:creationId xmlns:a16="http://schemas.microsoft.com/office/drawing/2014/main" id="{696B6C89-6E23-E74B-CAF8-BFF4C919A19F}"/>
+              </a:ext>
+            </a:extLst>
+          </p:cNvPr>
+          <p:cNvSpPr/>
+          <p:nvPr/>
+        </p:nvSpPr>
+        <p:spPr>
+          <a:xfrm>
+            <a:off x="841248" y="2212848"/>
+            <a:ext cx="621792" cy="137160"/>
+          </a:xfrm>
+          <a:prstGeom prst="rect">
+            <a:avLst/>
+          </a:prstGeom>
+          <a:noFill/>
+          <a:ln/>
+        </p:spPr>
+        <p:txBody>
+          <a:bodyPr wrap="square" lIns="0" tIns="0" rIns="0" bIns="0" rtlCol="0" anchor="ctr"/>
+          <a:lstStyle/>
+          <a:p>
+            <a:pPr marL="0" indent="0" algn="ctr">
+              <a:buNone/>
+            </a:pPr>
+            <a:r>
+              <a:rPr lang="en-US" sz="1100" b="1" dirty="0">
+                <a:solidFill>
+                  <a:srgbClr val="FFFFFF"/>
+                </a:solidFill>
+              </a:rPr>
+              <a:t>1</a:t>
+            </a:r>
+            <a:endParaRPr lang="en-US" sz="1100" dirty="0"/>
+          </a:p>
+        </p:txBody>
+      </p:sp>
+      <p:sp>
+        <p:nvSpPr>
+          <p:cNvPr id="16" name="Text 4">
+            <a:extLst>
+              <a:ext uri="{FF2B5EF4-FFF2-40B4-BE49-F238E27FC236}">
+                <a16:creationId xmlns:a16="http://schemas.microsoft.com/office/drawing/2014/main" id="{C8A71BDB-A70B-C2BC-8B47-ED5388BA8C59}"/>
+              </a:ext>
+            </a:extLst>
+          </p:cNvPr>
+          <p:cNvSpPr/>
+          <p:nvPr/>
+        </p:nvSpPr>
+        <p:spPr>
+          <a:xfrm>
+            <a:off x="493776" y="2807208"/>
+            <a:ext cx="1325880" cy="182880"/>
+          </a:xfrm>
+          <a:prstGeom prst="rect">
+            <a:avLst/>
+          </a:prstGeom>
+          <a:noFill/>
+          <a:ln/>
+        </p:spPr>
+        <p:txBody>
+          <a:bodyPr wrap="square" lIns="0" tIns="0" rIns="0" bIns="0" rtlCol="0" anchor="ctr"/>
+          <a:lstStyle/>
+          <a:p>
+            <a:pPr marL="0" indent="0" algn="ctr">
+              <a:buNone/>
+            </a:pPr>
+            <a:r>
+              <a:rPr lang="en-US" sz="1150" dirty="0">
+                <a:solidFill>
+                  <a:srgbClr val="4B5563"/>
+                </a:solidFill>
+              </a:rPr>
+              <a:t>Load</a:t>
+            </a:r>
+            <a:endParaRPr lang="en-US" sz="1150" dirty="0"/>
+          </a:p>
+        </p:txBody>
+      </p:sp>
+      <p:sp>
+        <p:nvSpPr>
+          <p:cNvPr id="20" name="Shape 5">
+            <a:extLst>
+              <a:ext uri="{FF2B5EF4-FFF2-40B4-BE49-F238E27FC236}">
+                <a16:creationId xmlns:a16="http://schemas.microsoft.com/office/drawing/2014/main" id="{FD0A191D-5444-867F-4E4E-159EDD959CD7}"/>
+              </a:ext>
+            </a:extLst>
+          </p:cNvPr>
+          <p:cNvSpPr/>
+          <p:nvPr/>
+        </p:nvSpPr>
+        <p:spPr>
+          <a:xfrm>
+            <a:off x="1499616" y="2368296"/>
+            <a:ext cx="685800" cy="0"/>
+          </a:xfrm>
+          <a:prstGeom prst="line">
+            <a:avLst/>
+          </a:prstGeom>
+          <a:noFill/>
+          <a:ln w="25400">
+            <a:solidFill>
+              <a:srgbClr val="D7DEE8"/>
+            </a:solidFill>
+            <a:prstDash val="solid"/>
+            <a:headEnd type="none"/>
+            <a:tailEnd type="triangle"/>
+          </a:ln>
+        </p:spPr>
+        <p:txBody>
+          <a:bodyPr/>
+          <a:lstStyle/>
+          <a:p>
+            <a:endParaRPr lang="en-US"/>
+          </a:p>
+        </p:txBody>
+      </p:sp>
+      <p:sp>
+        <p:nvSpPr>
+          <p:cNvPr id="22" name="Shape 6">
+            <a:extLst>
+              <a:ext uri="{FF2B5EF4-FFF2-40B4-BE49-F238E27FC236}">
+                <a16:creationId xmlns:a16="http://schemas.microsoft.com/office/drawing/2014/main" id="{3129BA29-D1C1-E6CB-0E62-584A705FDE9D}"/>
+              </a:ext>
+            </a:extLst>
+          </p:cNvPr>
+          <p:cNvSpPr/>
+          <p:nvPr/>
+        </p:nvSpPr>
+        <p:spPr>
+          <a:xfrm>
+            <a:off x="2395728" y="2048256"/>
+            <a:ext cx="621792" cy="621792"/>
+          </a:xfrm>
+          <a:prstGeom prst="ellipse">
+            <a:avLst/>
+          </a:prstGeom>
+          <a:solidFill>
+            <a:srgbClr val="0E7490"/>
+          </a:solidFill>
+          <a:ln w="12700">
+            <a:solidFill>
+              <a:srgbClr val="0E7490"/>
+            </a:solidFill>
+            <a:prstDash val="solid"/>
+          </a:ln>
+        </p:spPr>
+        <p:txBody>
+          <a:bodyPr/>
+          <a:lstStyle/>
+          <a:p>
+            <a:endParaRPr lang="en-US"/>
+          </a:p>
+        </p:txBody>
+      </p:sp>
+      <p:sp>
+        <p:nvSpPr>
+          <p:cNvPr id="24" name="Text 7">
+            <a:extLst>
+              <a:ext uri="{FF2B5EF4-FFF2-40B4-BE49-F238E27FC236}">
+                <a16:creationId xmlns:a16="http://schemas.microsoft.com/office/drawing/2014/main" id="{B4707713-95A6-A3EC-B2CC-06DC7E628DA3}"/>
+              </a:ext>
+            </a:extLst>
+          </p:cNvPr>
+          <p:cNvSpPr/>
+          <p:nvPr/>
+        </p:nvSpPr>
+        <p:spPr>
+          <a:xfrm>
+            <a:off x="2395728" y="2212848"/>
+            <a:ext cx="621792" cy="137160"/>
+          </a:xfrm>
+          <a:prstGeom prst="rect">
+            <a:avLst/>
+          </a:prstGeom>
+          <a:noFill/>
+          <a:ln/>
+        </p:spPr>
+        <p:txBody>
+          <a:bodyPr wrap="square" lIns="0" tIns="0" rIns="0" bIns="0" rtlCol="0" anchor="ctr"/>
+          <a:lstStyle/>
+          <a:p>
+            <a:pPr marL="0" indent="0" algn="ctr">
+              <a:buNone/>
+            </a:pPr>
+            <a:r>
+              <a:rPr lang="en-US" sz="1100" b="1" dirty="0">
+                <a:solidFill>
+                  <a:srgbClr val="FFFFFF"/>
+                </a:solidFill>
+              </a:rPr>
+              <a:t>2</a:t>
+            </a:r>
+            <a:endParaRPr lang="en-US" sz="1100" dirty="0"/>
+          </a:p>
+        </p:txBody>
+      </p:sp>
+      <p:sp>
+        <p:nvSpPr>
+          <p:cNvPr id="26" name="Text 8">
+            <a:extLst>
+              <a:ext uri="{FF2B5EF4-FFF2-40B4-BE49-F238E27FC236}">
+                <a16:creationId xmlns:a16="http://schemas.microsoft.com/office/drawing/2014/main" id="{A9254CEC-D708-470E-8122-1FAADAD8C624}"/>
+              </a:ext>
+            </a:extLst>
+          </p:cNvPr>
+          <p:cNvSpPr/>
+          <p:nvPr/>
+        </p:nvSpPr>
+        <p:spPr>
+          <a:xfrm>
+            <a:off x="2048256" y="2807208"/>
+            <a:ext cx="1325880" cy="182880"/>
+          </a:xfrm>
+          <a:prstGeom prst="rect">
+            <a:avLst/>
+          </a:prstGeom>
+          <a:noFill/>
+          <a:ln/>
+        </p:spPr>
+        <p:txBody>
+          <a:bodyPr wrap="square" lIns="0" tIns="0" rIns="0" bIns="0" rtlCol="0" anchor="ctr"/>
+          <a:lstStyle/>
+          <a:p>
+            <a:pPr marL="0" indent="0" algn="ctr">
+              <a:buNone/>
+            </a:pPr>
+            <a:r>
+              <a:rPr lang="en-US" sz="1150" dirty="0">
+                <a:solidFill>
+                  <a:srgbClr val="4B5563"/>
+                </a:solidFill>
+              </a:rPr>
+              <a:t>Inspect</a:t>
+            </a:r>
+            <a:endParaRPr lang="en-US" sz="1150" dirty="0"/>
+          </a:p>
+        </p:txBody>
+      </p:sp>
+      <p:sp>
+        <p:nvSpPr>
+          <p:cNvPr id="28" name="Shape 9">
+            <a:extLst>
+              <a:ext uri="{FF2B5EF4-FFF2-40B4-BE49-F238E27FC236}">
+                <a16:creationId xmlns:a16="http://schemas.microsoft.com/office/drawing/2014/main" id="{0E33C5B5-8595-228B-25D9-5F11AFE06BA0}"/>
+              </a:ext>
+            </a:extLst>
+          </p:cNvPr>
+          <p:cNvSpPr/>
+          <p:nvPr/>
+        </p:nvSpPr>
+        <p:spPr>
+          <a:xfrm>
+            <a:off x="3054096" y="2368296"/>
+            <a:ext cx="685800" cy="0"/>
+          </a:xfrm>
+          <a:prstGeom prst="line">
+            <a:avLst/>
+          </a:prstGeom>
+          <a:noFill/>
+          <a:ln w="25400">
+            <a:solidFill>
+              <a:srgbClr val="D7DEE8"/>
+            </a:solidFill>
+            <a:prstDash val="solid"/>
+            <a:headEnd type="none"/>
+            <a:tailEnd type="triangle"/>
+          </a:ln>
+        </p:spPr>
+        <p:txBody>
+          <a:bodyPr/>
+          <a:lstStyle/>
+          <a:p>
+            <a:endParaRPr lang="en-US"/>
+          </a:p>
+        </p:txBody>
+      </p:sp>
+      <p:sp>
+        <p:nvSpPr>
+          <p:cNvPr id="30" name="Shape 10">
+            <a:extLst>
+              <a:ext uri="{FF2B5EF4-FFF2-40B4-BE49-F238E27FC236}">
+                <a16:creationId xmlns:a16="http://schemas.microsoft.com/office/drawing/2014/main" id="{1E097BF4-2790-E123-D834-D28EE23B278D}"/>
+              </a:ext>
+            </a:extLst>
+          </p:cNvPr>
+          <p:cNvSpPr/>
+          <p:nvPr/>
+        </p:nvSpPr>
+        <p:spPr>
+          <a:xfrm>
+            <a:off x="3950208" y="2048256"/>
+            <a:ext cx="621792" cy="621792"/>
+          </a:xfrm>
+          <a:prstGeom prst="ellipse">
+            <a:avLst/>
+          </a:prstGeom>
+          <a:solidFill>
+            <a:srgbClr val="F97316"/>
+          </a:solidFill>
+          <a:ln w="12700">
+            <a:solidFill>
+              <a:srgbClr val="F97316"/>
+            </a:solidFill>
+            <a:prstDash val="solid"/>
+          </a:ln>
+        </p:spPr>
+        <p:txBody>
+          <a:bodyPr/>
+          <a:lstStyle/>
+          <a:p>
+            <a:endParaRPr lang="en-US"/>
+          </a:p>
+        </p:txBody>
+      </p:sp>
+      <p:sp>
+        <p:nvSpPr>
+          <p:cNvPr id="32" name="Text 11">
+            <a:extLst>
+              <a:ext uri="{FF2B5EF4-FFF2-40B4-BE49-F238E27FC236}">
+                <a16:creationId xmlns:a16="http://schemas.microsoft.com/office/drawing/2014/main" id="{D8769ECD-EC98-E951-F273-F079387A89B7}"/>
+              </a:ext>
+            </a:extLst>
+          </p:cNvPr>
+          <p:cNvSpPr/>
+          <p:nvPr/>
+        </p:nvSpPr>
+        <p:spPr>
+          <a:xfrm>
+            <a:off x="3950208" y="2212848"/>
+            <a:ext cx="621792" cy="137160"/>
+          </a:xfrm>
+          <a:prstGeom prst="rect">
+            <a:avLst/>
+          </a:prstGeom>
+          <a:noFill/>
+          <a:ln/>
+        </p:spPr>
+        <p:txBody>
+          <a:bodyPr wrap="square" lIns="0" tIns="0" rIns="0" bIns="0" rtlCol="0" anchor="ctr"/>
+          <a:lstStyle/>
+          <a:p>
+            <a:pPr marL="0" indent="0" algn="ctr">
+              <a:buNone/>
+            </a:pPr>
+            <a:r>
+              <a:rPr lang="en-US" sz="1100" b="1" dirty="0">
+                <a:solidFill>
+                  <a:srgbClr val="FFFFFF"/>
+                </a:solidFill>
+              </a:rPr>
+              <a:t>3</a:t>
+            </a:r>
+            <a:endParaRPr lang="en-US" sz="1100" dirty="0"/>
+          </a:p>
+        </p:txBody>
+      </p:sp>
+      <p:sp>
+        <p:nvSpPr>
+          <p:cNvPr id="34" name="Text 12">
+            <a:extLst>
+              <a:ext uri="{FF2B5EF4-FFF2-40B4-BE49-F238E27FC236}">
+                <a16:creationId xmlns:a16="http://schemas.microsoft.com/office/drawing/2014/main" id="{3C302185-03D2-AD64-0CFA-E51FCF267F6A}"/>
+              </a:ext>
+            </a:extLst>
+          </p:cNvPr>
+          <p:cNvSpPr/>
+          <p:nvPr/>
+        </p:nvSpPr>
+        <p:spPr>
+          <a:xfrm>
+            <a:off x="3602736" y="2807208"/>
+            <a:ext cx="1325880" cy="182880"/>
+          </a:xfrm>
+          <a:prstGeom prst="rect">
+            <a:avLst/>
+          </a:prstGeom>
+          <a:noFill/>
+          <a:ln/>
+        </p:spPr>
+        <p:txBody>
+          <a:bodyPr wrap="square" lIns="0" tIns="0" rIns="0" bIns="0" rtlCol="0" anchor="ctr"/>
+          <a:lstStyle/>
+          <a:p>
+            <a:pPr marL="0" indent="0" algn="ctr">
+              <a:buNone/>
+            </a:pPr>
+            <a:r>
+              <a:rPr lang="en-US" sz="1150" dirty="0">
+                <a:solidFill>
+                  <a:srgbClr val="4B5563"/>
+                </a:solidFill>
+              </a:rPr>
+              <a:t>Visualize</a:t>
+            </a:r>
+            <a:endParaRPr lang="en-US" sz="1150" dirty="0"/>
+          </a:p>
+        </p:txBody>
+      </p:sp>
+      <p:sp>
+        <p:nvSpPr>
+          <p:cNvPr id="36" name="Shape 13">
+            <a:extLst>
+              <a:ext uri="{FF2B5EF4-FFF2-40B4-BE49-F238E27FC236}">
+                <a16:creationId xmlns:a16="http://schemas.microsoft.com/office/drawing/2014/main" id="{30F219B8-0265-D765-0149-287784690912}"/>
+              </a:ext>
+            </a:extLst>
+          </p:cNvPr>
+          <p:cNvSpPr/>
+          <p:nvPr/>
+        </p:nvSpPr>
+        <p:spPr>
+          <a:xfrm>
+            <a:off x="4608576" y="2368296"/>
+            <a:ext cx="685800" cy="0"/>
+          </a:xfrm>
+          <a:prstGeom prst="line">
+            <a:avLst/>
+          </a:prstGeom>
+          <a:noFill/>
+          <a:ln w="25400">
+            <a:solidFill>
+              <a:srgbClr val="D7DEE8"/>
+            </a:solidFill>
+            <a:prstDash val="solid"/>
+            <a:headEnd type="none"/>
+            <a:tailEnd type="triangle"/>
+          </a:ln>
+        </p:spPr>
+        <p:txBody>
+          <a:bodyPr/>
+          <a:lstStyle/>
+          <a:p>
+            <a:endParaRPr lang="en-US"/>
+          </a:p>
+        </p:txBody>
+      </p:sp>
+      <p:sp>
+        <p:nvSpPr>
+          <p:cNvPr id="38" name="Shape 14">
+            <a:extLst>
+              <a:ext uri="{FF2B5EF4-FFF2-40B4-BE49-F238E27FC236}">
+                <a16:creationId xmlns:a16="http://schemas.microsoft.com/office/drawing/2014/main" id="{CF2AE6C1-4E4E-6B99-EEA9-C65EEECEA819}"/>
+              </a:ext>
+            </a:extLst>
+          </p:cNvPr>
+          <p:cNvSpPr/>
+          <p:nvPr/>
+        </p:nvSpPr>
+        <p:spPr>
+          <a:xfrm>
+            <a:off x="5504688" y="2048256"/>
+            <a:ext cx="621792" cy="621792"/>
+          </a:xfrm>
+          <a:prstGeom prst="ellipse">
+            <a:avLst/>
+          </a:prstGeom>
+          <a:solidFill>
+            <a:srgbClr val="166534"/>
+          </a:solidFill>
+          <a:ln w="12700">
+            <a:solidFill>
+              <a:srgbClr val="166534"/>
+            </a:solidFill>
+            <a:prstDash val="solid"/>
+          </a:ln>
+        </p:spPr>
+        <p:txBody>
+          <a:bodyPr/>
+          <a:lstStyle/>
+          <a:p>
+            <a:endParaRPr lang="en-US"/>
+          </a:p>
+        </p:txBody>
+      </p:sp>
+      <p:sp>
+        <p:nvSpPr>
+          <p:cNvPr id="40" name="Text 15">
+            <a:extLst>
+              <a:ext uri="{FF2B5EF4-FFF2-40B4-BE49-F238E27FC236}">
+                <a16:creationId xmlns:a16="http://schemas.microsoft.com/office/drawing/2014/main" id="{5FD21750-A2C3-A148-95BF-A95F843EA2CC}"/>
+              </a:ext>
+            </a:extLst>
+          </p:cNvPr>
+          <p:cNvSpPr/>
+          <p:nvPr/>
+        </p:nvSpPr>
+        <p:spPr>
+          <a:xfrm>
+            <a:off x="5504688" y="2212848"/>
+            <a:ext cx="621792" cy="137160"/>
+          </a:xfrm>
+          <a:prstGeom prst="rect">
+            <a:avLst/>
+          </a:prstGeom>
+          <a:noFill/>
+          <a:ln/>
+        </p:spPr>
+        <p:txBody>
+          <a:bodyPr wrap="square" lIns="0" tIns="0" rIns="0" bIns="0" rtlCol="0" anchor="ctr"/>
+          <a:lstStyle/>
+          <a:p>
+            <a:pPr marL="0" indent="0" algn="ctr">
+              <a:buNone/>
+            </a:pPr>
+            <a:r>
+              <a:rPr lang="en-US" sz="1100" b="1" dirty="0">
+                <a:solidFill>
+                  <a:srgbClr val="FFFFFF"/>
+                </a:solidFill>
+              </a:rPr>
+              <a:t>4</a:t>
+            </a:r>
+            <a:endParaRPr lang="en-US" sz="1100" dirty="0"/>
+          </a:p>
+        </p:txBody>
+      </p:sp>
+      <p:sp>
+        <p:nvSpPr>
+          <p:cNvPr id="42" name="Text 16">
+            <a:extLst>
+              <a:ext uri="{FF2B5EF4-FFF2-40B4-BE49-F238E27FC236}">
+                <a16:creationId xmlns:a16="http://schemas.microsoft.com/office/drawing/2014/main" id="{D4FB9BA9-796A-CFD9-607C-6DAC4DAF00C9}"/>
+              </a:ext>
+            </a:extLst>
+          </p:cNvPr>
+          <p:cNvSpPr/>
+          <p:nvPr/>
+        </p:nvSpPr>
+        <p:spPr>
+          <a:xfrm>
+            <a:off x="5157216" y="2807208"/>
+            <a:ext cx="1325880" cy="182880"/>
+          </a:xfrm>
+          <a:prstGeom prst="rect">
+            <a:avLst/>
+          </a:prstGeom>
+          <a:noFill/>
+          <a:ln/>
+        </p:spPr>
+        <p:txBody>
+          <a:bodyPr wrap="square" lIns="0" tIns="0" rIns="0" bIns="0" rtlCol="0" anchor="ctr"/>
+          <a:lstStyle/>
+          <a:p>
+            <a:pPr marL="0" indent="0" algn="ctr">
+              <a:buNone/>
+            </a:pPr>
+            <a:r>
+              <a:rPr lang="en-US" sz="1150" dirty="0">
+                <a:solidFill>
+                  <a:srgbClr val="4B5563"/>
+                </a:solidFill>
+              </a:rPr>
+              <a:t>Split</a:t>
+            </a:r>
+            <a:endParaRPr lang="en-US" sz="1150" dirty="0"/>
+          </a:p>
+        </p:txBody>
+      </p:sp>
+      <p:sp>
+        <p:nvSpPr>
+          <p:cNvPr id="44" name="Shape 17">
+            <a:extLst>
+              <a:ext uri="{FF2B5EF4-FFF2-40B4-BE49-F238E27FC236}">
+                <a16:creationId xmlns:a16="http://schemas.microsoft.com/office/drawing/2014/main" id="{72699688-9E68-4788-8946-9EA4D82A2E71}"/>
+              </a:ext>
+            </a:extLst>
+          </p:cNvPr>
+          <p:cNvSpPr/>
+          <p:nvPr/>
+        </p:nvSpPr>
+        <p:spPr>
+          <a:xfrm>
+            <a:off x="6163056" y="2368296"/>
+            <a:ext cx="685800" cy="0"/>
+          </a:xfrm>
+          <a:prstGeom prst="line">
+            <a:avLst/>
+          </a:prstGeom>
+          <a:noFill/>
+          <a:ln w="25400">
+            <a:solidFill>
+              <a:srgbClr val="D7DEE8"/>
+            </a:solidFill>
+            <a:prstDash val="solid"/>
+            <a:headEnd type="none"/>
+            <a:tailEnd type="triangle"/>
+          </a:ln>
+        </p:spPr>
+        <p:txBody>
+          <a:bodyPr/>
+          <a:lstStyle/>
+          <a:p>
+            <a:endParaRPr lang="en-US"/>
+          </a:p>
+        </p:txBody>
+      </p:sp>
+      <p:sp>
+        <p:nvSpPr>
+          <p:cNvPr id="46" name="Shape 18">
+            <a:extLst>
+              <a:ext uri="{FF2B5EF4-FFF2-40B4-BE49-F238E27FC236}">
+                <a16:creationId xmlns:a16="http://schemas.microsoft.com/office/drawing/2014/main" id="{26F8CB0D-CF20-D04C-00BD-8ACFA4B17EA6}"/>
+              </a:ext>
+            </a:extLst>
+          </p:cNvPr>
+          <p:cNvSpPr/>
+          <p:nvPr/>
+        </p:nvSpPr>
+        <p:spPr>
+          <a:xfrm>
+            <a:off x="7059168" y="2048256"/>
+            <a:ext cx="621792" cy="621792"/>
+          </a:xfrm>
+          <a:prstGeom prst="ellipse">
+            <a:avLst/>
+          </a:prstGeom>
+          <a:solidFill>
+            <a:srgbClr val="7C3AED"/>
+          </a:solidFill>
+          <a:ln w="12700">
+            <a:solidFill>
+              <a:srgbClr val="7C3AED"/>
+            </a:solidFill>
+            <a:prstDash val="solid"/>
+          </a:ln>
+        </p:spPr>
+        <p:txBody>
+          <a:bodyPr/>
+          <a:lstStyle/>
+          <a:p>
+            <a:endParaRPr lang="en-US"/>
+          </a:p>
+        </p:txBody>
+      </p:sp>
+      <p:sp>
+        <p:nvSpPr>
+          <p:cNvPr id="48" name="Text 19">
+            <a:extLst>
+              <a:ext uri="{FF2B5EF4-FFF2-40B4-BE49-F238E27FC236}">
+                <a16:creationId xmlns:a16="http://schemas.microsoft.com/office/drawing/2014/main" id="{4F22E666-B0E7-10A0-7EA9-0AD71D018F56}"/>
+              </a:ext>
+            </a:extLst>
+          </p:cNvPr>
+          <p:cNvSpPr/>
+          <p:nvPr/>
+        </p:nvSpPr>
+        <p:spPr>
+          <a:xfrm>
+            <a:off x="7059168" y="2212848"/>
+            <a:ext cx="621792" cy="137160"/>
+          </a:xfrm>
+          <a:prstGeom prst="rect">
+            <a:avLst/>
+          </a:prstGeom>
+          <a:noFill/>
+          <a:ln/>
+        </p:spPr>
+        <p:txBody>
+          <a:bodyPr wrap="square" lIns="0" tIns="0" rIns="0" bIns="0" rtlCol="0" anchor="ctr"/>
+          <a:lstStyle/>
+          <a:p>
+            <a:pPr marL="0" indent="0" algn="ctr">
+              <a:buNone/>
+            </a:pPr>
+            <a:r>
+              <a:rPr lang="en-US" sz="1100" b="1" dirty="0">
+                <a:solidFill>
+                  <a:srgbClr val="FFFFFF"/>
+                </a:solidFill>
+              </a:rPr>
+              <a:t>5</a:t>
+            </a:r>
+            <a:endParaRPr lang="en-US" sz="1100" dirty="0"/>
+          </a:p>
+        </p:txBody>
+      </p:sp>
+      <p:sp>
+        <p:nvSpPr>
+          <p:cNvPr id="50" name="Text 20">
+            <a:extLst>
+              <a:ext uri="{FF2B5EF4-FFF2-40B4-BE49-F238E27FC236}">
+                <a16:creationId xmlns:a16="http://schemas.microsoft.com/office/drawing/2014/main" id="{1A674A69-790A-E60A-9E75-5FE4AD7BA910}"/>
+              </a:ext>
+            </a:extLst>
+          </p:cNvPr>
+          <p:cNvSpPr/>
+          <p:nvPr/>
+        </p:nvSpPr>
+        <p:spPr>
+          <a:xfrm>
+            <a:off x="6711696" y="2807208"/>
+            <a:ext cx="1325880" cy="182880"/>
+          </a:xfrm>
+          <a:prstGeom prst="rect">
+            <a:avLst/>
+          </a:prstGeom>
+          <a:noFill/>
+          <a:ln/>
+        </p:spPr>
+        <p:txBody>
+          <a:bodyPr wrap="square" lIns="0" tIns="0" rIns="0" bIns="0" rtlCol="0" anchor="ctr"/>
+          <a:lstStyle/>
+          <a:p>
+            <a:pPr marL="0" indent="0" algn="ctr">
+              <a:buNone/>
+            </a:pPr>
+            <a:r>
+              <a:rPr lang="en-US" sz="1150" dirty="0">
+                <a:solidFill>
+                  <a:srgbClr val="4B5563"/>
+                </a:solidFill>
+              </a:rPr>
+              <a:t>Baseline</a:t>
+            </a:r>
+            <a:endParaRPr lang="en-US" sz="1150" dirty="0"/>
+          </a:p>
+        </p:txBody>
+      </p:sp>
+      <p:sp>
+        <p:nvSpPr>
+          <p:cNvPr id="52" name="Shape 21">
+            <a:extLst>
+              <a:ext uri="{FF2B5EF4-FFF2-40B4-BE49-F238E27FC236}">
+                <a16:creationId xmlns:a16="http://schemas.microsoft.com/office/drawing/2014/main" id="{C590966E-9329-F6FF-F884-76D9D6B1E0CA}"/>
+              </a:ext>
+            </a:extLst>
+          </p:cNvPr>
+          <p:cNvSpPr/>
+          <p:nvPr/>
+        </p:nvSpPr>
+        <p:spPr>
+          <a:xfrm>
+            <a:off x="7717536" y="2368296"/>
+            <a:ext cx="685800" cy="0"/>
+          </a:xfrm>
+          <a:prstGeom prst="line">
+            <a:avLst/>
+          </a:prstGeom>
+          <a:noFill/>
+          <a:ln w="25400">
+            <a:solidFill>
+              <a:srgbClr val="D7DEE8"/>
+            </a:solidFill>
+            <a:prstDash val="solid"/>
+            <a:headEnd type="none"/>
+            <a:tailEnd type="triangle"/>
+          </a:ln>
+        </p:spPr>
+        <p:txBody>
+          <a:bodyPr/>
+          <a:lstStyle/>
+          <a:p>
+            <a:endParaRPr lang="en-US"/>
+          </a:p>
+        </p:txBody>
+      </p:sp>
+      <p:sp>
+        <p:nvSpPr>
+          <p:cNvPr id="54" name="Shape 22">
+            <a:extLst>
+              <a:ext uri="{FF2B5EF4-FFF2-40B4-BE49-F238E27FC236}">
+                <a16:creationId xmlns:a16="http://schemas.microsoft.com/office/drawing/2014/main" id="{B676C410-CF4B-4D5D-969C-B12AD27A1472}"/>
+              </a:ext>
+            </a:extLst>
+          </p:cNvPr>
+          <p:cNvSpPr/>
+          <p:nvPr/>
+        </p:nvSpPr>
+        <p:spPr>
+          <a:xfrm>
+            <a:off x="8613648" y="2048256"/>
+            <a:ext cx="621792" cy="621792"/>
+          </a:xfrm>
+          <a:prstGeom prst="ellipse">
+            <a:avLst/>
+          </a:prstGeom>
+          <a:solidFill>
+            <a:srgbClr val="12355B"/>
+          </a:solidFill>
+          <a:ln w="12700">
+            <a:solidFill>
+              <a:srgbClr val="12355B"/>
+            </a:solidFill>
+            <a:prstDash val="solid"/>
+          </a:ln>
+        </p:spPr>
+        <p:txBody>
+          <a:bodyPr/>
+          <a:lstStyle/>
+          <a:p>
+            <a:endParaRPr lang="en-US"/>
+          </a:p>
+        </p:txBody>
+      </p:sp>
+      <p:sp>
+        <p:nvSpPr>
+          <p:cNvPr id="56" name="Text 23">
+            <a:extLst>
+              <a:ext uri="{FF2B5EF4-FFF2-40B4-BE49-F238E27FC236}">
+                <a16:creationId xmlns:a16="http://schemas.microsoft.com/office/drawing/2014/main" id="{E6C2B4D6-7C5F-F1A4-C592-694453F86C7E}"/>
+              </a:ext>
+            </a:extLst>
+          </p:cNvPr>
+          <p:cNvSpPr/>
+          <p:nvPr/>
+        </p:nvSpPr>
+        <p:spPr>
+          <a:xfrm>
+            <a:off x="8613648" y="2212848"/>
+            <a:ext cx="621792" cy="137160"/>
+          </a:xfrm>
+          <a:prstGeom prst="rect">
+            <a:avLst/>
+          </a:prstGeom>
+          <a:noFill/>
+          <a:ln/>
+        </p:spPr>
+        <p:txBody>
+          <a:bodyPr wrap="square" lIns="0" tIns="0" rIns="0" bIns="0" rtlCol="0" anchor="ctr"/>
+          <a:lstStyle/>
+          <a:p>
+            <a:pPr marL="0" indent="0" algn="ctr">
+              <a:buNone/>
+            </a:pPr>
+            <a:r>
+              <a:rPr lang="en-US" sz="1100" b="1" dirty="0">
+                <a:solidFill>
+                  <a:srgbClr val="FFFFFF"/>
+                </a:solidFill>
+              </a:rPr>
+              <a:t>6</a:t>
+            </a:r>
+            <a:endParaRPr lang="en-US" sz="1100" dirty="0"/>
+          </a:p>
+        </p:txBody>
+      </p:sp>
+      <p:sp>
+        <p:nvSpPr>
+          <p:cNvPr id="58" name="Text 24">
+            <a:extLst>
+              <a:ext uri="{FF2B5EF4-FFF2-40B4-BE49-F238E27FC236}">
+                <a16:creationId xmlns:a16="http://schemas.microsoft.com/office/drawing/2014/main" id="{4F2B6BF6-05BA-6C16-68E5-F37324214104}"/>
+              </a:ext>
+            </a:extLst>
+          </p:cNvPr>
+          <p:cNvSpPr/>
+          <p:nvPr/>
+        </p:nvSpPr>
+        <p:spPr>
+          <a:xfrm>
+            <a:off x="8266176" y="2807208"/>
+            <a:ext cx="1325880" cy="182880"/>
+          </a:xfrm>
+          <a:prstGeom prst="rect">
+            <a:avLst/>
+          </a:prstGeom>
+          <a:noFill/>
+          <a:ln/>
+        </p:spPr>
+        <p:txBody>
+          <a:bodyPr wrap="square" lIns="0" tIns="0" rIns="0" bIns="0" rtlCol="0" anchor="ctr"/>
+          <a:lstStyle/>
+          <a:p>
+            <a:pPr marL="0" indent="0" algn="ctr">
+              <a:buNone/>
+            </a:pPr>
+            <a:r>
+              <a:rPr lang="en-US" sz="1150" dirty="0">
+                <a:solidFill>
+                  <a:srgbClr val="4B5563"/>
+                </a:solidFill>
+              </a:rPr>
+              <a:t>Train</a:t>
+            </a:r>
+            <a:endParaRPr lang="en-US" sz="1150" dirty="0"/>
+          </a:p>
+        </p:txBody>
+      </p:sp>
+      <p:sp>
+        <p:nvSpPr>
+          <p:cNvPr id="60" name="Shape 25">
+            <a:extLst>
+              <a:ext uri="{FF2B5EF4-FFF2-40B4-BE49-F238E27FC236}">
+                <a16:creationId xmlns:a16="http://schemas.microsoft.com/office/drawing/2014/main" id="{6F0BECCC-8983-25F4-389C-741F0B67DA08}"/>
+              </a:ext>
+            </a:extLst>
+          </p:cNvPr>
+          <p:cNvSpPr/>
+          <p:nvPr/>
+        </p:nvSpPr>
+        <p:spPr>
+          <a:xfrm>
+            <a:off x="9272016" y="2368296"/>
+            <a:ext cx="685800" cy="0"/>
+          </a:xfrm>
+          <a:prstGeom prst="line">
+            <a:avLst/>
+          </a:prstGeom>
+          <a:noFill/>
+          <a:ln w="25400">
+            <a:solidFill>
+              <a:srgbClr val="D7DEE8"/>
+            </a:solidFill>
+            <a:prstDash val="solid"/>
+            <a:headEnd type="none"/>
+            <a:tailEnd type="triangle"/>
+          </a:ln>
+        </p:spPr>
+        <p:txBody>
+          <a:bodyPr/>
+          <a:lstStyle/>
+          <a:p>
+            <a:endParaRPr lang="en-US"/>
+          </a:p>
+        </p:txBody>
+      </p:sp>
+      <p:sp>
+        <p:nvSpPr>
+          <p:cNvPr id="62" name="Shape 26">
+            <a:extLst>
+              <a:ext uri="{FF2B5EF4-FFF2-40B4-BE49-F238E27FC236}">
+                <a16:creationId xmlns:a16="http://schemas.microsoft.com/office/drawing/2014/main" id="{3A39C6F1-5817-DA07-C713-2F0451E51233}"/>
+              </a:ext>
+            </a:extLst>
+          </p:cNvPr>
+          <p:cNvSpPr/>
+          <p:nvPr/>
+        </p:nvSpPr>
+        <p:spPr>
+          <a:xfrm>
+            <a:off x="10168128" y="2048256"/>
+            <a:ext cx="621792" cy="621792"/>
+          </a:xfrm>
+          <a:prstGeom prst="ellipse">
+            <a:avLst/>
+          </a:prstGeom>
+          <a:solidFill>
+            <a:srgbClr val="2F80ED"/>
+          </a:solidFill>
+          <a:ln w="12700">
+            <a:solidFill>
+              <a:srgbClr val="2F80ED"/>
+            </a:solidFill>
+            <a:prstDash val="solid"/>
+          </a:ln>
+        </p:spPr>
+        <p:txBody>
+          <a:bodyPr/>
+          <a:lstStyle/>
+          <a:p>
+            <a:endParaRPr lang="en-US"/>
+          </a:p>
+        </p:txBody>
+      </p:sp>
+      <p:sp>
+        <p:nvSpPr>
+          <p:cNvPr id="64" name="Text 27">
+            <a:extLst>
+              <a:ext uri="{FF2B5EF4-FFF2-40B4-BE49-F238E27FC236}">
+                <a16:creationId xmlns:a16="http://schemas.microsoft.com/office/drawing/2014/main" id="{7928DD57-8864-D389-A23F-0A4B6E4D2AED}"/>
+              </a:ext>
+            </a:extLst>
+          </p:cNvPr>
+          <p:cNvSpPr/>
+          <p:nvPr/>
+        </p:nvSpPr>
+        <p:spPr>
+          <a:xfrm>
+            <a:off x="10168128" y="2212848"/>
+            <a:ext cx="621792" cy="137160"/>
+          </a:xfrm>
+          <a:prstGeom prst="rect">
+            <a:avLst/>
+          </a:prstGeom>
+          <a:noFill/>
+          <a:ln/>
+        </p:spPr>
+        <p:txBody>
+          <a:bodyPr wrap="square" lIns="0" tIns="0" rIns="0" bIns="0" rtlCol="0" anchor="ctr"/>
+          <a:lstStyle/>
+          <a:p>
+            <a:pPr marL="0" indent="0" algn="ctr">
+              <a:buNone/>
+            </a:pPr>
+            <a:r>
+              <a:rPr lang="en-US" sz="1100" b="1" dirty="0">
+                <a:solidFill>
+                  <a:srgbClr val="FFFFFF"/>
+                </a:solidFill>
+              </a:rPr>
+              <a:t>7</a:t>
+            </a:r>
+            <a:endParaRPr lang="en-US" sz="1100" dirty="0"/>
+          </a:p>
+        </p:txBody>
+      </p:sp>
+      <p:sp>
+        <p:nvSpPr>
+          <p:cNvPr id="66" name="Text 28">
+            <a:extLst>
+              <a:ext uri="{FF2B5EF4-FFF2-40B4-BE49-F238E27FC236}">
+                <a16:creationId xmlns:a16="http://schemas.microsoft.com/office/drawing/2014/main" id="{2F732E55-60C6-E628-ABD2-C0977241E34A}"/>
+              </a:ext>
+            </a:extLst>
+          </p:cNvPr>
+          <p:cNvSpPr/>
+          <p:nvPr/>
+        </p:nvSpPr>
+        <p:spPr>
+          <a:xfrm>
+            <a:off x="9820656" y="2807208"/>
+            <a:ext cx="1325880" cy="182880"/>
+          </a:xfrm>
+          <a:prstGeom prst="rect">
+            <a:avLst/>
+          </a:prstGeom>
+          <a:noFill/>
+          <a:ln/>
+        </p:spPr>
+        <p:txBody>
+          <a:bodyPr wrap="square" lIns="0" tIns="0" rIns="0" bIns="0" rtlCol="0" anchor="ctr"/>
+          <a:lstStyle/>
+          <a:p>
+            <a:pPr marL="0" indent="0" algn="ctr">
+              <a:buNone/>
+            </a:pPr>
+            <a:r>
+              <a:rPr lang="en-US" sz="1150" dirty="0">
+                <a:solidFill>
+                  <a:srgbClr val="4B5563"/>
+                </a:solidFill>
+              </a:rPr>
+              <a:t>Evaluate</a:t>
+            </a:r>
+            <a:endParaRPr lang="en-US" sz="1150" dirty="0"/>
+          </a:p>
+        </p:txBody>
+      </p:sp>
+      <p:sp>
+        <p:nvSpPr>
+          <p:cNvPr id="68" name="Shape 29">
+            <a:extLst>
+              <a:ext uri="{FF2B5EF4-FFF2-40B4-BE49-F238E27FC236}">
+                <a16:creationId xmlns:a16="http://schemas.microsoft.com/office/drawing/2014/main" id="{7D935811-3FAE-B6FD-A50C-6939E09D842B}"/>
+              </a:ext>
+            </a:extLst>
+          </p:cNvPr>
+          <p:cNvSpPr/>
+          <p:nvPr/>
+        </p:nvSpPr>
+        <p:spPr>
+          <a:xfrm>
+            <a:off x="886968" y="3602736"/>
+            <a:ext cx="5120640" cy="1874520"/>
+          </a:xfrm>
+          <a:prstGeom prst="roundRect">
+            <a:avLst>
+              <a:gd name="adj" fmla="val 2927"/>
+            </a:avLst>
+          </a:prstGeom>
+          <a:solidFill>
+            <a:srgbClr val="111827"/>
+          </a:solidFill>
+          <a:ln w="12700">
+            <a:solidFill>
+              <a:srgbClr val="111827"/>
+            </a:solidFill>
+            <a:prstDash val="solid"/>
+          </a:ln>
+        </p:spPr>
+        <p:txBody>
+          <a:bodyPr/>
+          <a:lstStyle/>
+          <a:p>
+            <a:endParaRPr lang="en-US"/>
+          </a:p>
+        </p:txBody>
+      </p:sp>
+      <p:sp>
+        <p:nvSpPr>
+          <p:cNvPr id="70" name="Text 30">
+            <a:extLst>
+              <a:ext uri="{FF2B5EF4-FFF2-40B4-BE49-F238E27FC236}">
+                <a16:creationId xmlns:a16="http://schemas.microsoft.com/office/drawing/2014/main" id="{1163C746-4163-E093-0FA4-CA76D7191AE1}"/>
+              </a:ext>
+            </a:extLst>
+          </p:cNvPr>
+          <p:cNvSpPr/>
+          <p:nvPr/>
+        </p:nvSpPr>
+        <p:spPr>
+          <a:xfrm>
+            <a:off x="1051560" y="3730752"/>
+            <a:ext cx="4791456" cy="1618488"/>
           </a:xfrm>
           <a:prstGeom prst="rect">
             <a:avLst/>
@@ -5704,44 +6957,667 @@
           </a:bodyPr>
           <a:lstStyle/>
           <a:p>
+            <a:pPr marL="0" indent="0">
+              <a:buNone/>
+            </a:pPr>
+            <a:r>
+              <a:rPr lang="en-US" sz="840" dirty="0">
+                <a:solidFill>
+                  <a:srgbClr val="E5E7EB"/>
+                </a:solidFill>
+                <a:latin typeface="Cascadia Mono" pitchFamily="34" charset="0"/>
+                <a:ea typeface="Cascadia Mono" pitchFamily="34" charset="-122"/>
+                <a:cs typeface="Cascadia Mono" pitchFamily="34" charset="-120"/>
+              </a:rPr>
+              <a:t>df = pd.read_csv("classification_workshop.csv")</a:t>
+            </a:r>
+            <a:endParaRPr lang="en-US" sz="840" dirty="0"/>
+          </a:p>
+          <a:p>
+            <a:pPr marL="0" indent="0">
+              <a:buNone/>
+            </a:pPr>
+            <a:r>
+              <a:rPr lang="en-US" sz="840" dirty="0">
+                <a:solidFill>
+                  <a:srgbClr val="E5E7EB"/>
+                </a:solidFill>
+                <a:latin typeface="Cascadia Mono" pitchFamily="34" charset="0"/>
+                <a:ea typeface="Cascadia Mono" pitchFamily="34" charset="-122"/>
+                <a:cs typeface="Cascadia Mono" pitchFamily="34" charset="-120"/>
+              </a:rPr>
+              <a:t>X = df[features]</a:t>
+            </a:r>
+            <a:endParaRPr lang="en-US" sz="840" dirty="0"/>
+          </a:p>
+          <a:p>
+            <a:pPr marL="0" indent="0">
+              <a:buNone/>
+            </a:pPr>
+            <a:r>
+              <a:rPr lang="en-US" sz="840" dirty="0">
+                <a:solidFill>
+                  <a:srgbClr val="E5E7EB"/>
+                </a:solidFill>
+                <a:latin typeface="Cascadia Mono" pitchFamily="34" charset="0"/>
+                <a:ea typeface="Cascadia Mono" pitchFamily="34" charset="-122"/>
+                <a:cs typeface="Cascadia Mono" pitchFamily="34" charset="-120"/>
+              </a:rPr>
+              <a:t>y = df[target]</a:t>
+            </a:r>
+            <a:endParaRPr lang="en-US" sz="840" dirty="0"/>
+          </a:p>
+          <a:p>
+            <a:pPr marL="0" indent="0">
+              <a:buNone/>
+            </a:pPr>
+            <a:endParaRPr lang="en-US" sz="840" dirty="0"/>
+          </a:p>
+          <a:p>
+            <a:pPr marL="0" indent="0">
+              <a:buNone/>
+            </a:pPr>
+            <a:r>
+              <a:rPr lang="en-US" sz="840" dirty="0">
+                <a:solidFill>
+                  <a:srgbClr val="E5E7EB"/>
+                </a:solidFill>
+                <a:latin typeface="Cascadia Mono" pitchFamily="34" charset="0"/>
+                <a:ea typeface="Cascadia Mono" pitchFamily="34" charset="-122"/>
+                <a:cs typeface="Cascadia Mono" pitchFamily="34" charset="-120"/>
+              </a:rPr>
+              <a:t>X_train, X_test, y_train, y_test = train_test_split(X, y, stratify=y)</a:t>
+            </a:r>
+            <a:endParaRPr lang="en-US" sz="840" dirty="0"/>
+          </a:p>
+          <a:p>
+            <a:pPr marL="0" indent="0">
+              <a:buNone/>
+            </a:pPr>
+            <a:endParaRPr lang="en-US" sz="840" dirty="0"/>
+          </a:p>
+          <a:p>
+            <a:pPr marL="0" indent="0">
+              <a:buNone/>
+            </a:pPr>
+            <a:r>
+              <a:rPr lang="en-US" sz="840" dirty="0">
+                <a:solidFill>
+                  <a:srgbClr val="E5E7EB"/>
+                </a:solidFill>
+                <a:latin typeface="Cascadia Mono" pitchFamily="34" charset="0"/>
+                <a:ea typeface="Cascadia Mono" pitchFamily="34" charset="-122"/>
+                <a:cs typeface="Cascadia Mono" pitchFamily="34" charset="-120"/>
+              </a:rPr>
+              <a:t>model.fit(X_train, y_train)</a:t>
+            </a:r>
+            <a:endParaRPr lang="en-US" sz="840" dirty="0"/>
+          </a:p>
+          <a:p>
+            <a:pPr marL="0" indent="0">
+              <a:buNone/>
+            </a:pPr>
+            <a:r>
+              <a:rPr lang="en-US" sz="840" dirty="0">
+                <a:solidFill>
+                  <a:srgbClr val="E5E7EB"/>
+                </a:solidFill>
+                <a:latin typeface="Cascadia Mono" pitchFamily="34" charset="0"/>
+                <a:ea typeface="Cascadia Mono" pitchFamily="34" charset="-122"/>
+                <a:cs typeface="Cascadia Mono" pitchFamily="34" charset="-120"/>
+              </a:rPr>
+              <a:t>pred = model.predict(X_test)</a:t>
+            </a:r>
+            <a:endParaRPr lang="en-US" sz="840" dirty="0"/>
+          </a:p>
+        </p:txBody>
+      </p:sp>
+      <p:sp>
+        <p:nvSpPr>
+          <p:cNvPr id="72" name="Text 31">
+            <a:extLst>
+              <a:ext uri="{FF2B5EF4-FFF2-40B4-BE49-F238E27FC236}">
+                <a16:creationId xmlns:a16="http://schemas.microsoft.com/office/drawing/2014/main" id="{8ED2CD30-CD4E-E9D8-BD27-CF8552331159}"/>
+              </a:ext>
+            </a:extLst>
+          </p:cNvPr>
+          <p:cNvSpPr/>
+          <p:nvPr/>
+        </p:nvSpPr>
+        <p:spPr>
+          <a:xfrm>
+            <a:off x="6601968" y="3602736"/>
+            <a:ext cx="4343400" cy="256032"/>
+          </a:xfrm>
+          <a:prstGeom prst="rect">
+            <a:avLst/>
+          </a:prstGeom>
+          <a:noFill/>
+          <a:ln/>
+        </p:spPr>
+        <p:txBody>
+          <a:bodyPr wrap="square" lIns="0" tIns="0" rIns="0" bIns="0" rtlCol="0" anchor="ctr"/>
+          <a:lstStyle/>
+          <a:p>
+            <a:pPr marL="0" indent="0">
+              <a:buNone/>
+            </a:pPr>
+            <a:r>
+              <a:rPr lang="en-US" sz="1500" b="1" dirty="0">
+                <a:solidFill>
+                  <a:srgbClr val="7C3AED"/>
+                </a:solidFill>
+              </a:rPr>
+              <a:t>What faculty produce</a:t>
+            </a:r>
+            <a:endParaRPr lang="en-US" sz="1500" dirty="0"/>
+          </a:p>
+        </p:txBody>
+      </p:sp>
+      <p:sp>
+        <p:nvSpPr>
+          <p:cNvPr id="74" name="Text 32">
+            <a:extLst>
+              <a:ext uri="{FF2B5EF4-FFF2-40B4-BE49-F238E27FC236}">
+                <a16:creationId xmlns:a16="http://schemas.microsoft.com/office/drawing/2014/main" id="{0BE7DEA5-3C59-8D5F-4696-E6764890B402}"/>
+              </a:ext>
+            </a:extLst>
+          </p:cNvPr>
+          <p:cNvSpPr/>
+          <p:nvPr/>
+        </p:nvSpPr>
+        <p:spPr>
+          <a:xfrm>
+            <a:off x="6601968" y="3941064"/>
+            <a:ext cx="4343400" cy="1261872"/>
+          </a:xfrm>
+          <a:prstGeom prst="rect">
+            <a:avLst/>
+          </a:prstGeom>
+          <a:noFill/>
+          <a:ln/>
+        </p:spPr>
+        <p:txBody>
+          <a:bodyPr wrap="square" lIns="254" tIns="254" rIns="254" bIns="254" rtlCol="0" anchor="ctr">
+            <a:normAutofit/>
+          </a:bodyPr>
+          <a:lstStyle/>
+          <a:p>
+            <a:pPr marL="0" indent="0">
+              <a:buNone/>
+            </a:pPr>
+            <a:r>
+              <a:rPr lang="en-US" sz="1250" dirty="0">
+                <a:solidFill>
+                  <a:srgbClr val="4B5563"/>
+                </a:solidFill>
+              </a:rPr>
+              <a:t>• A baseline comparison</a:t>
+            </a:r>
+            <a:endParaRPr lang="en-US" sz="1250" dirty="0"/>
+          </a:p>
+          <a:p>
+            <a:pPr marL="0" indent="0">
+              <a:buNone/>
+            </a:pPr>
+            <a:r>
+              <a:rPr lang="en-US" sz="1250" dirty="0">
+                <a:solidFill>
+                  <a:srgbClr val="4B5563"/>
+                </a:solidFill>
+              </a:rPr>
+              <a:t>• A first model result</a:t>
+            </a:r>
+            <a:endParaRPr lang="en-US" sz="1250" dirty="0"/>
+          </a:p>
+          <a:p>
+            <a:pPr marL="0" indent="0">
+              <a:buNone/>
+            </a:pPr>
+            <a:r>
+              <a:rPr lang="en-US" sz="1250" dirty="0">
+                <a:solidFill>
+                  <a:srgbClr val="4B5563"/>
+                </a:solidFill>
+              </a:rPr>
+              <a:t>• A metric-based interpretation</a:t>
+            </a:r>
+            <a:endParaRPr lang="en-US" sz="1250" dirty="0"/>
+          </a:p>
+          <a:p>
+            <a:pPr marL="0" indent="0">
+              <a:buNone/>
+            </a:pPr>
+            <a:r>
+              <a:rPr lang="en-US" sz="1250" dirty="0">
+                <a:solidFill>
+                  <a:srgbClr val="4B5563"/>
+                </a:solidFill>
+              </a:rPr>
+              <a:t>• One limitation</a:t>
+            </a:r>
+            <a:endParaRPr lang="en-US" sz="1250" dirty="0"/>
+          </a:p>
+          <a:p>
+            <a:pPr marL="0" indent="0">
+              <a:buNone/>
+            </a:pPr>
+            <a:r>
+              <a:rPr lang="en-US" sz="1250" dirty="0">
+                <a:solidFill>
+                  <a:srgbClr val="4B5563"/>
+                </a:solidFill>
+              </a:rPr>
+              <a:t>• One recommended next step</a:t>
+            </a:r>
+            <a:endParaRPr lang="en-US" sz="1250" dirty="0"/>
+          </a:p>
+        </p:txBody>
+      </p:sp>
+      <p:sp>
+        <p:nvSpPr>
+          <p:cNvPr id="76" name="Shape 33">
+            <a:extLst>
+              <a:ext uri="{FF2B5EF4-FFF2-40B4-BE49-F238E27FC236}">
+                <a16:creationId xmlns:a16="http://schemas.microsoft.com/office/drawing/2014/main" id="{D799BADE-C4DA-346B-BD52-9FF63DA8848E}"/>
+              </a:ext>
+            </a:extLst>
+          </p:cNvPr>
+          <p:cNvSpPr/>
+          <p:nvPr/>
+        </p:nvSpPr>
+        <p:spPr>
+          <a:xfrm>
+            <a:off x="6601968" y="5660136"/>
+            <a:ext cx="1417320" cy="292608"/>
+          </a:xfrm>
+          <a:prstGeom prst="roundRect">
+            <a:avLst>
+              <a:gd name="adj" fmla="val 25000"/>
+            </a:avLst>
+          </a:prstGeom>
+          <a:solidFill>
+            <a:srgbClr val="7C3AED"/>
+          </a:solidFill>
+          <a:ln w="12700">
+            <a:solidFill>
+              <a:srgbClr val="7C3AED"/>
+            </a:solidFill>
+            <a:prstDash val="solid"/>
+          </a:ln>
+        </p:spPr>
+        <p:txBody>
+          <a:bodyPr/>
+          <a:lstStyle/>
+          <a:p>
+            <a:endParaRPr lang="en-US"/>
+          </a:p>
+        </p:txBody>
+      </p:sp>
+      <p:sp>
+        <p:nvSpPr>
+          <p:cNvPr id="78" name="Text 34">
+            <a:extLst>
+              <a:ext uri="{FF2B5EF4-FFF2-40B4-BE49-F238E27FC236}">
+                <a16:creationId xmlns:a16="http://schemas.microsoft.com/office/drawing/2014/main" id="{6D35EE97-0857-C2DD-2739-A14C24942CD7}"/>
+              </a:ext>
+            </a:extLst>
+          </p:cNvPr>
+          <p:cNvSpPr/>
+          <p:nvPr/>
+        </p:nvSpPr>
+        <p:spPr>
+          <a:xfrm>
+            <a:off x="6601968" y="5728716"/>
+            <a:ext cx="1417320" cy="128016"/>
+          </a:xfrm>
+          <a:prstGeom prst="rect">
+            <a:avLst/>
+          </a:prstGeom>
+          <a:noFill/>
+          <a:ln/>
+        </p:spPr>
+        <p:txBody>
+          <a:bodyPr wrap="square" lIns="0" tIns="0" rIns="0" bIns="0" rtlCol="0" anchor="ctr"/>
+          <a:lstStyle/>
+          <a:p>
+            <a:pPr marL="0" indent="0" algn="ctr">
+              <a:buNone/>
+            </a:pPr>
+            <a:r>
+              <a:rPr lang="en-US" sz="850" b="1" dirty="0">
+                <a:solidFill>
+                  <a:srgbClr val="FFFFFF"/>
+                </a:solidFill>
+              </a:rPr>
+              <a:t>Session 5 notebook</a:t>
+            </a:r>
+            <a:endParaRPr lang="en-US" sz="850" dirty="0"/>
+          </a:p>
+        </p:txBody>
+      </p:sp>
+      <p:sp>
+        <p:nvSpPr>
+          <p:cNvPr id="80" name="Text 35">
+            <a:extLst>
+              <a:ext uri="{FF2B5EF4-FFF2-40B4-BE49-F238E27FC236}">
+                <a16:creationId xmlns:a16="http://schemas.microsoft.com/office/drawing/2014/main" id="{D2505C53-AE37-6FA3-1BDB-D2B43E7AB6BC}"/>
+              </a:ext>
+            </a:extLst>
+          </p:cNvPr>
+          <p:cNvSpPr/>
+          <p:nvPr/>
+        </p:nvSpPr>
+        <p:spPr>
+          <a:xfrm>
+            <a:off x="8156448" y="5696712"/>
+            <a:ext cx="3657600" cy="164592"/>
+          </a:xfrm>
+          <a:prstGeom prst="rect">
+            <a:avLst/>
+          </a:prstGeom>
+          <a:noFill/>
+          <a:ln/>
+        </p:spPr>
+        <p:txBody>
+          <a:bodyPr wrap="square" lIns="0" tIns="0" rIns="0" bIns="0" rtlCol="0" anchor="ctr"/>
+          <a:lstStyle/>
+          <a:p>
+            <a:pPr marL="0" indent="0">
+              <a:buNone/>
+            </a:pPr>
+            <a:r>
+              <a:rPr lang="en-US" sz="1120" dirty="0">
+                <a:solidFill>
+                  <a:srgbClr val="111827"/>
+                </a:solidFill>
+                <a:latin typeface="Cascadia Mono" pitchFamily="34" charset="0"/>
+                <a:ea typeface="Cascadia Mono" pitchFamily="34" charset="-122"/>
+                <a:cs typeface="Cascadia Mono" pitchFamily="34" charset="-120"/>
+              </a:rPr>
+              <a:t>05_session5_complete_workflow.ipynb</a:t>
+            </a:r>
+            <a:endParaRPr lang="en-US" sz="1120" dirty="0"/>
+          </a:p>
+        </p:txBody>
+      </p:sp>
+    </p:spTree>
+    <p:extLst>
+      <p:ext uri="{BB962C8B-B14F-4D97-AF65-F5344CB8AC3E}">
+        <p14:creationId xmlns:p14="http://schemas.microsoft.com/office/powerpoint/2010/main" val="3792904897"/>
+      </p:ext>
+    </p:extLst>
+  </p:cSld>
+  <p:clrMapOvr>
+    <a:masterClrMapping/>
+  </p:clrMapOvr>
+</p:sld>
+</file>
+
+<file path=ppt/slides/slide14.xml><?xml version="1.0" encoding="utf-8"?>
+<p:sld xmlns:a="http://schemas.openxmlformats.org/drawingml/2006/main" xmlns:r="http://schemas.openxmlformats.org/officeDocument/2006/relationships" xmlns:p="http://schemas.openxmlformats.org/presentationml/2006/main">
+  <p:cSld>
+    <p:bg>
+      <p:bgPr>
+        <a:solidFill>
+          <a:srgbClr val="FBFBFC"/>
+        </a:solidFill>
+        <a:effectLst/>
+      </p:bgPr>
+    </p:bg>
+    <p:spTree>
+      <p:nvGrpSpPr>
+        <p:cNvPr id="1" name="">
+          <a:extLst>
+            <a:ext uri="{FF2B5EF4-FFF2-40B4-BE49-F238E27FC236}">
+              <a16:creationId xmlns:a16="http://schemas.microsoft.com/office/drawing/2014/main" id="{6ADF232F-CBCB-B1C9-E730-B6CA8FEC2860}"/>
+            </a:ext>
+          </a:extLst>
+        </p:cNvPr>
+        <p:cNvGrpSpPr/>
+        <p:nvPr/>
+      </p:nvGrpSpPr>
+      <p:grpSpPr>
+        <a:xfrm>
+          <a:off x="0" y="0"/>
+          <a:ext cx="0" cy="0"/>
+          <a:chOff x="0" y="0"/>
+          <a:chExt cx="0" cy="0"/>
+        </a:xfrm>
+      </p:grpSpPr>
+      <p:sp>
+        <p:nvSpPr>
+          <p:cNvPr id="2" name="Shape 0">
+            <a:extLst>
+              <a:ext uri="{FF2B5EF4-FFF2-40B4-BE49-F238E27FC236}">
+                <a16:creationId xmlns:a16="http://schemas.microsoft.com/office/drawing/2014/main" id="{84944489-95C4-0729-6734-1FF6CED57C6A}"/>
+              </a:ext>
+            </a:extLst>
+          </p:cNvPr>
+          <p:cNvSpPr/>
+          <p:nvPr/>
+        </p:nvSpPr>
+        <p:spPr>
+          <a:xfrm>
+            <a:off x="0" y="0"/>
+            <a:ext cx="12191695" cy="201168"/>
+          </a:xfrm>
+          <a:prstGeom prst="rect">
+            <a:avLst/>
+          </a:prstGeom>
+          <a:solidFill>
+            <a:srgbClr val="C8102E"/>
+          </a:solidFill>
+          <a:ln w="12700">
+            <a:solidFill>
+              <a:srgbClr val="C8102E">
+                <a:alpha val="0"/>
+              </a:srgbClr>
+            </a:solidFill>
+            <a:prstDash val="solid"/>
+          </a:ln>
+        </p:spPr>
+        <p:txBody>
+          <a:bodyPr/>
+          <a:lstStyle/>
+          <a:p>
+            <a:endParaRPr lang="en-US"/>
+          </a:p>
+        </p:txBody>
+      </p:sp>
+      <p:sp>
+        <p:nvSpPr>
+          <p:cNvPr id="3" name="Text 1">
+            <a:extLst>
+              <a:ext uri="{FF2B5EF4-FFF2-40B4-BE49-F238E27FC236}">
+                <a16:creationId xmlns:a16="http://schemas.microsoft.com/office/drawing/2014/main" id="{78352B0F-F742-7F5A-C210-0AC3ECA3A03C}"/>
+              </a:ext>
+            </a:extLst>
+          </p:cNvPr>
+          <p:cNvSpPr/>
+          <p:nvPr/>
+        </p:nvSpPr>
+        <p:spPr>
+          <a:xfrm>
+            <a:off x="502920" y="338328"/>
+            <a:ext cx="4572000" cy="201168"/>
+          </a:xfrm>
+          <a:prstGeom prst="rect">
+            <a:avLst/>
+          </a:prstGeom>
+          <a:noFill/>
+          <a:ln/>
+        </p:spPr>
+        <p:txBody>
+          <a:bodyPr wrap="square" lIns="0" tIns="0" rIns="0" bIns="0" rtlCol="0" anchor="ctr"/>
+          <a:lstStyle/>
+          <a:p>
+            <a:pPr marL="0" indent="0">
+              <a:buNone/>
+            </a:pPr>
+            <a:r>
+              <a:rPr lang="en-US" sz="750" b="1" dirty="0">
+                <a:solidFill>
+                  <a:srgbClr val="6B7280"/>
+                </a:solidFill>
+                <a:latin typeface="Aptos" pitchFamily="34" charset="0"/>
+                <a:ea typeface="Aptos" pitchFamily="34" charset="-122"/>
+                <a:cs typeface="Aptos" pitchFamily="34" charset="-120"/>
+              </a:rPr>
+              <a:t>APPLIED AI DESIGN WORKSHOP</a:t>
+            </a:r>
+            <a:endParaRPr lang="en-US" sz="750" dirty="0"/>
+          </a:p>
+        </p:txBody>
+      </p:sp>
+      <p:sp>
+        <p:nvSpPr>
+          <p:cNvPr id="4" name="Text 2">
+            <a:extLst>
+              <a:ext uri="{FF2B5EF4-FFF2-40B4-BE49-F238E27FC236}">
+                <a16:creationId xmlns:a16="http://schemas.microsoft.com/office/drawing/2014/main" id="{B9060574-BD26-CE1B-A0B6-14F19AD89C39}"/>
+              </a:ext>
+            </a:extLst>
+          </p:cNvPr>
+          <p:cNvSpPr/>
+          <p:nvPr/>
+        </p:nvSpPr>
+        <p:spPr>
+          <a:xfrm>
+            <a:off x="502920" y="621792"/>
+            <a:ext cx="8961120" cy="475488"/>
+          </a:xfrm>
+          <a:prstGeom prst="rect">
+            <a:avLst/>
+          </a:prstGeom>
+          <a:noFill/>
+          <a:ln/>
+        </p:spPr>
+        <p:txBody>
+          <a:bodyPr wrap="square" lIns="0" tIns="0" rIns="0" bIns="0" rtlCol="0" anchor="ctr">
+            <a:normAutofit/>
+          </a:bodyPr>
+          <a:lstStyle/>
+          <a:p>
+            <a:pPr marL="0" indent="0">
+              <a:buNone/>
+            </a:pPr>
+            <a:r>
+              <a:rPr lang="en-US" sz="2400" b="1" dirty="0">
+                <a:solidFill>
+                  <a:srgbClr val="1F2937"/>
+                </a:solidFill>
+                <a:latin typeface="Aptos Display" pitchFamily="34" charset="0"/>
+                <a:ea typeface="Aptos Display" pitchFamily="34" charset="-122"/>
+                <a:cs typeface="Aptos Display" pitchFamily="34" charset="-120"/>
+              </a:rPr>
+              <a:t>Participant output: first-pass model card</a:t>
+            </a:r>
+            <a:endParaRPr lang="en-US" sz="2400" dirty="0"/>
+          </a:p>
+        </p:txBody>
+      </p:sp>
+      <p:sp>
+        <p:nvSpPr>
+          <p:cNvPr id="5" name="Text 3">
+            <a:extLst>
+              <a:ext uri="{FF2B5EF4-FFF2-40B4-BE49-F238E27FC236}">
+                <a16:creationId xmlns:a16="http://schemas.microsoft.com/office/drawing/2014/main" id="{11CC079F-C858-9D87-EDC9-68A4ADF37570}"/>
+              </a:ext>
+            </a:extLst>
+          </p:cNvPr>
+          <p:cNvSpPr/>
+          <p:nvPr/>
+        </p:nvSpPr>
+        <p:spPr>
+          <a:xfrm>
+            <a:off x="10561320" y="420624"/>
+            <a:ext cx="1097280" cy="292608"/>
+          </a:xfrm>
+          <a:prstGeom prst="rect">
+            <a:avLst/>
+          </a:prstGeom>
+          <a:noFill/>
+          <a:ln/>
+        </p:spPr>
+        <p:txBody>
+          <a:bodyPr wrap="square" lIns="0" tIns="0" rIns="0" bIns="0" rtlCol="0" anchor="ctr"/>
+          <a:lstStyle/>
+          <a:p>
+            <a:pPr marL="0" indent="0" algn="r">
+              <a:buNone/>
+            </a:pPr>
+            <a:r>
+              <a:rPr lang="en-US" sz="1000" dirty="0">
+                <a:solidFill>
+                  <a:srgbClr val="6B7280"/>
+                </a:solidFill>
+              </a:rPr>
+              <a:t>Session 5</a:t>
+            </a:r>
+            <a:endParaRPr lang="en-US" sz="1000" dirty="0"/>
+          </a:p>
+        </p:txBody>
+      </p:sp>
+      <p:sp>
+        <p:nvSpPr>
+          <p:cNvPr id="6" name="Text 4">
+            <a:extLst>
+              <a:ext uri="{FF2B5EF4-FFF2-40B4-BE49-F238E27FC236}">
+                <a16:creationId xmlns:a16="http://schemas.microsoft.com/office/drawing/2014/main" id="{2AD10CF9-836C-E98F-DA11-90E92AEFEB94}"/>
+              </a:ext>
+            </a:extLst>
+          </p:cNvPr>
+          <p:cNvSpPr/>
+          <p:nvPr/>
+        </p:nvSpPr>
+        <p:spPr>
+          <a:xfrm>
+            <a:off x="777240" y="1207008"/>
+            <a:ext cx="10332720" cy="384048"/>
+          </a:xfrm>
+          <a:prstGeom prst="rect">
+            <a:avLst/>
+          </a:prstGeom>
+          <a:noFill/>
+          <a:ln/>
+        </p:spPr>
+        <p:txBody>
+          <a:bodyPr wrap="square" lIns="254" tIns="254" rIns="254" bIns="254" rtlCol="0" anchor="t">
+            <a:normAutofit/>
+          </a:bodyPr>
+          <a:lstStyle/>
+          <a:p>
             <a:pPr marL="0" indent="0" algn="l">
               <a:buNone/>
             </a:pPr>
             <a:r>
-              <a:rPr lang="en-US" sz="1380" b="1" dirty="0">
-                <a:solidFill>
-                  <a:srgbClr val="1F2937"/>
-                </a:solidFill>
-              </a:rPr>
-              <a:t>Baseline</a:t>
-            </a:r>
-            <a:endParaRPr lang="en-US" sz="1380" dirty="0"/>
-          </a:p>
-          <a:p>
-            <a:pPr marL="0" indent="0" algn="l">
-              <a:buNone/>
-            </a:pPr>
-            <a:r>
-              <a:rPr lang="en-US" sz="1380" b="1" dirty="0">
-                <a:solidFill>
-                  <a:srgbClr val="1F2937"/>
-                </a:solidFill>
-              </a:rPr>
-              <a:t>Simple rule and its performance</a:t>
-            </a:r>
-            <a:endParaRPr lang="en-US" sz="1380" dirty="0"/>
-          </a:p>
-        </p:txBody>
-      </p:sp>
-      <p:sp>
-        <p:nvSpPr>
-          <p:cNvPr id="13" name="Shape 11"/>
-          <p:cNvSpPr/>
-          <p:nvPr/>
-        </p:nvSpPr>
-        <p:spPr>
-          <a:xfrm>
-            <a:off x="6217920" y="2834640"/>
+              <a:rPr lang="en-US" sz="1800" b="1" dirty="0">
+                <a:solidFill>
+                  <a:srgbClr val="1F2937"/>
+                </a:solidFill>
+              </a:rPr>
+              <a:t>Each group should leave with a short model card summarizing the baseline analysis.</a:t>
+            </a:r>
+            <a:endParaRPr lang="en-US" sz="1800" dirty="0"/>
+          </a:p>
+        </p:txBody>
+      </p:sp>
+      <p:sp>
+        <p:nvSpPr>
+          <p:cNvPr id="7" name="Shape 5">
+            <a:extLst>
+              <a:ext uri="{FF2B5EF4-FFF2-40B4-BE49-F238E27FC236}">
+                <a16:creationId xmlns:a16="http://schemas.microsoft.com/office/drawing/2014/main" id="{64E5528F-E9D1-54E1-51C4-09A233651F0D}"/>
+              </a:ext>
+            </a:extLst>
+          </p:cNvPr>
+          <p:cNvSpPr/>
+          <p:nvPr/>
+        </p:nvSpPr>
+        <p:spPr>
+          <a:xfrm>
+            <a:off x="868680" y="1828800"/>
             <a:ext cx="4709160" cy="713232"/>
           </a:xfrm>
           <a:prstGeom prst="roundRect">
@@ -5769,13 +7645,19 @@
       </p:sp>
       <p:sp>
         <p:nvSpPr>
-          <p:cNvPr id="14" name="Text 12"/>
-          <p:cNvSpPr/>
-          <p:nvPr/>
-        </p:nvSpPr>
-        <p:spPr>
-          <a:xfrm>
-            <a:off x="6382512" y="2953512"/>
+          <p:cNvPr id="8" name="Text 6">
+            <a:extLst>
+              <a:ext uri="{FF2B5EF4-FFF2-40B4-BE49-F238E27FC236}">
+                <a16:creationId xmlns:a16="http://schemas.microsoft.com/office/drawing/2014/main" id="{90C3EE1D-C63C-9123-3DC4-28FBFAEC6CFB}"/>
+              </a:ext>
+            </a:extLst>
+          </p:cNvPr>
+          <p:cNvSpPr/>
+          <p:nvPr/>
+        </p:nvSpPr>
+        <p:spPr>
+          <a:xfrm>
+            <a:off x="1033272" y="1947672"/>
             <a:ext cx="4379976" cy="512064"/>
           </a:xfrm>
           <a:prstGeom prst="rect">
@@ -5799,7 +7681,7 @@
                   <a:srgbClr val="1F2937"/>
                 </a:solidFill>
               </a:rPr>
-              <a:t>Model</a:t>
+              <a:t>Problem statement</a:t>
             </a:r>
             <a:endParaRPr lang="en-US" sz="1380" dirty="0"/>
           </a:p>
@@ -5813,7 +7695,7 @@
                   <a:srgbClr val="1F2937"/>
                 </a:solidFill>
               </a:rPr>
-              <a:t>Algorithm, inputs, split method, and metric</a:t>
+              <a:t>What is predicted, for whom or what, and why?</a:t>
             </a:r>
             <a:endParaRPr lang="en-US" sz="1380" dirty="0"/>
           </a:p>
@@ -5821,13 +7703,19 @@
       </p:sp>
       <p:sp>
         <p:nvSpPr>
-          <p:cNvPr id="15" name="Shape 13"/>
-          <p:cNvSpPr/>
-          <p:nvPr/>
-        </p:nvSpPr>
-        <p:spPr>
-          <a:xfrm>
-            <a:off x="868680" y="3840480"/>
+          <p:cNvPr id="9" name="Shape 7">
+            <a:extLst>
+              <a:ext uri="{FF2B5EF4-FFF2-40B4-BE49-F238E27FC236}">
+                <a16:creationId xmlns:a16="http://schemas.microsoft.com/office/drawing/2014/main" id="{31BAE1BB-5D17-A511-EE66-3554F60E1A8F}"/>
+              </a:ext>
+            </a:extLst>
+          </p:cNvPr>
+          <p:cNvSpPr/>
+          <p:nvPr/>
+        </p:nvSpPr>
+        <p:spPr>
+          <a:xfrm>
+            <a:off x="6217920" y="1828800"/>
             <a:ext cx="4709160" cy="713232"/>
           </a:xfrm>
           <a:prstGeom prst="roundRect">
@@ -5855,13 +7743,19 @@
       </p:sp>
       <p:sp>
         <p:nvSpPr>
-          <p:cNvPr id="16" name="Text 14"/>
-          <p:cNvSpPr/>
-          <p:nvPr/>
-        </p:nvSpPr>
-        <p:spPr>
-          <a:xfrm>
-            <a:off x="1033272" y="3959352"/>
+          <p:cNvPr id="10" name="Text 8">
+            <a:extLst>
+              <a:ext uri="{FF2B5EF4-FFF2-40B4-BE49-F238E27FC236}">
+                <a16:creationId xmlns:a16="http://schemas.microsoft.com/office/drawing/2014/main" id="{C4711EFB-64AB-DF3E-0A3A-6D12ECBB5578}"/>
+              </a:ext>
+            </a:extLst>
+          </p:cNvPr>
+          <p:cNvSpPr/>
+          <p:nvPr/>
+        </p:nvSpPr>
+        <p:spPr>
+          <a:xfrm>
+            <a:off x="6382512" y="1947672"/>
             <a:ext cx="4379976" cy="512064"/>
           </a:xfrm>
           <a:prstGeom prst="rect">
@@ -5885,7 +7779,7 @@
                   <a:srgbClr val="1F2937"/>
                 </a:solidFill>
               </a:rPr>
-              <a:t>Results</a:t>
+              <a:t>Dataset</a:t>
             </a:r>
             <a:endParaRPr lang="en-US" sz="1380" dirty="0"/>
           </a:p>
@@ -5899,7 +7793,7 @@
                   <a:srgbClr val="1F2937"/>
                 </a:solidFill>
               </a:rPr>
-              <a:t>Performance compared with baseline and observed error pattern</a:t>
+              <a:t>Rows, variables, target, missing values, and leakage concerns</a:t>
             </a:r>
             <a:endParaRPr lang="en-US" sz="1380" dirty="0"/>
           </a:p>
@@ -5907,13 +7801,19 @@
       </p:sp>
       <p:sp>
         <p:nvSpPr>
-          <p:cNvPr id="17" name="Shape 15"/>
-          <p:cNvSpPr/>
-          <p:nvPr/>
-        </p:nvSpPr>
-        <p:spPr>
-          <a:xfrm>
-            <a:off x="6217920" y="3840480"/>
+          <p:cNvPr id="11" name="Shape 9">
+            <a:extLst>
+              <a:ext uri="{FF2B5EF4-FFF2-40B4-BE49-F238E27FC236}">
+                <a16:creationId xmlns:a16="http://schemas.microsoft.com/office/drawing/2014/main" id="{B37331F6-DB00-0689-B4EC-D5A0CADD34BA}"/>
+              </a:ext>
+            </a:extLst>
+          </p:cNvPr>
+          <p:cNvSpPr/>
+          <p:nvPr/>
+        </p:nvSpPr>
+        <p:spPr>
+          <a:xfrm>
+            <a:off x="868680" y="2834640"/>
             <a:ext cx="4709160" cy="713232"/>
           </a:xfrm>
           <a:prstGeom prst="roundRect">
@@ -5941,13 +7841,215 @@
       </p:sp>
       <p:sp>
         <p:nvSpPr>
-          <p:cNvPr id="18" name="Text 16"/>
-          <p:cNvSpPr/>
-          <p:nvPr/>
-        </p:nvSpPr>
-        <p:spPr>
-          <a:xfrm>
-            <a:off x="6382512" y="3959352"/>
+          <p:cNvPr id="12" name="Text 10">
+            <a:extLst>
+              <a:ext uri="{FF2B5EF4-FFF2-40B4-BE49-F238E27FC236}">
+                <a16:creationId xmlns:a16="http://schemas.microsoft.com/office/drawing/2014/main" id="{E4F45E1F-0D6D-1FF6-D8FF-6FC714FAA543}"/>
+              </a:ext>
+            </a:extLst>
+          </p:cNvPr>
+          <p:cNvSpPr/>
+          <p:nvPr/>
+        </p:nvSpPr>
+        <p:spPr>
+          <a:xfrm>
+            <a:off x="1033272" y="2953512"/>
+            <a:ext cx="4379976" cy="512064"/>
+          </a:xfrm>
+          <a:prstGeom prst="rect">
+            <a:avLst/>
+          </a:prstGeom>
+          <a:noFill/>
+          <a:ln/>
+        </p:spPr>
+        <p:txBody>
+          <a:bodyPr wrap="square" lIns="254" tIns="254" rIns="254" bIns="254" rtlCol="0" anchor="ctr">
+            <a:normAutofit/>
+          </a:bodyPr>
+          <a:lstStyle/>
+          <a:p>
+            <a:pPr marL="0" indent="0" algn="l">
+              <a:buNone/>
+            </a:pPr>
+            <a:r>
+              <a:rPr lang="en-US" sz="1380" b="1" dirty="0">
+                <a:solidFill>
+                  <a:srgbClr val="1F2937"/>
+                </a:solidFill>
+              </a:rPr>
+              <a:t>Baseline</a:t>
+            </a:r>
+            <a:endParaRPr lang="en-US" sz="1380" dirty="0"/>
+          </a:p>
+          <a:p>
+            <a:pPr marL="0" indent="0" algn="l">
+              <a:buNone/>
+            </a:pPr>
+            <a:r>
+              <a:rPr lang="en-US" sz="1380" b="1" dirty="0">
+                <a:solidFill>
+                  <a:srgbClr val="1F2937"/>
+                </a:solidFill>
+              </a:rPr>
+              <a:t>Simple rule and its performance</a:t>
+            </a:r>
+            <a:endParaRPr lang="en-US" sz="1380" dirty="0"/>
+          </a:p>
+        </p:txBody>
+      </p:sp>
+      <p:sp>
+        <p:nvSpPr>
+          <p:cNvPr id="13" name="Shape 11">
+            <a:extLst>
+              <a:ext uri="{FF2B5EF4-FFF2-40B4-BE49-F238E27FC236}">
+                <a16:creationId xmlns:a16="http://schemas.microsoft.com/office/drawing/2014/main" id="{1BFA674B-E32C-B69A-C502-32F770A337D5}"/>
+              </a:ext>
+            </a:extLst>
+          </p:cNvPr>
+          <p:cNvSpPr/>
+          <p:nvPr/>
+        </p:nvSpPr>
+        <p:spPr>
+          <a:xfrm>
+            <a:off x="6217920" y="2834640"/>
+            <a:ext cx="4709160" cy="713232"/>
+          </a:xfrm>
+          <a:prstGeom prst="roundRect">
+            <a:avLst>
+              <a:gd name="adj" fmla="val 10256"/>
+            </a:avLst>
+          </a:prstGeom>
+          <a:solidFill>
+            <a:srgbClr val="FFFFFF"/>
+          </a:solidFill>
+          <a:ln w="12700">
+            <a:solidFill>
+              <a:srgbClr val="E5E7EB"/>
+            </a:solidFill>
+            <a:prstDash val="solid"/>
+          </a:ln>
+        </p:spPr>
+        <p:txBody>
+          <a:bodyPr/>
+          <a:lstStyle/>
+          <a:p>
+            <a:endParaRPr lang="en-US"/>
+          </a:p>
+        </p:txBody>
+      </p:sp>
+      <p:sp>
+        <p:nvSpPr>
+          <p:cNvPr id="14" name="Text 12">
+            <a:extLst>
+              <a:ext uri="{FF2B5EF4-FFF2-40B4-BE49-F238E27FC236}">
+                <a16:creationId xmlns:a16="http://schemas.microsoft.com/office/drawing/2014/main" id="{A050FB07-4806-4D67-98A5-2271E81F78A2}"/>
+              </a:ext>
+            </a:extLst>
+          </p:cNvPr>
+          <p:cNvSpPr/>
+          <p:nvPr/>
+        </p:nvSpPr>
+        <p:spPr>
+          <a:xfrm>
+            <a:off x="6382512" y="2953512"/>
+            <a:ext cx="4379976" cy="512064"/>
+          </a:xfrm>
+          <a:prstGeom prst="rect">
+            <a:avLst/>
+          </a:prstGeom>
+          <a:noFill/>
+          <a:ln/>
+        </p:spPr>
+        <p:txBody>
+          <a:bodyPr wrap="square" lIns="254" tIns="254" rIns="254" bIns="254" rtlCol="0" anchor="ctr">
+            <a:normAutofit/>
+          </a:bodyPr>
+          <a:lstStyle/>
+          <a:p>
+            <a:pPr marL="0" indent="0" algn="l">
+              <a:buNone/>
+            </a:pPr>
+            <a:r>
+              <a:rPr lang="en-US" sz="1380" b="1" dirty="0">
+                <a:solidFill>
+                  <a:srgbClr val="1F2937"/>
+                </a:solidFill>
+              </a:rPr>
+              <a:t>Model</a:t>
+            </a:r>
+            <a:endParaRPr lang="en-US" sz="1380" dirty="0"/>
+          </a:p>
+          <a:p>
+            <a:pPr marL="0" indent="0" algn="l">
+              <a:buNone/>
+            </a:pPr>
+            <a:r>
+              <a:rPr lang="en-US" sz="1380" b="1" dirty="0">
+                <a:solidFill>
+                  <a:srgbClr val="1F2937"/>
+                </a:solidFill>
+              </a:rPr>
+              <a:t>Algorithm, inputs, split method, and metric</a:t>
+            </a:r>
+            <a:endParaRPr lang="en-US" sz="1380" dirty="0"/>
+          </a:p>
+        </p:txBody>
+      </p:sp>
+      <p:sp>
+        <p:nvSpPr>
+          <p:cNvPr id="15" name="Shape 13">
+            <a:extLst>
+              <a:ext uri="{FF2B5EF4-FFF2-40B4-BE49-F238E27FC236}">
+                <a16:creationId xmlns:a16="http://schemas.microsoft.com/office/drawing/2014/main" id="{5AAB7666-C69E-E3B0-0EC2-7E82D02DEA5C}"/>
+              </a:ext>
+            </a:extLst>
+          </p:cNvPr>
+          <p:cNvSpPr/>
+          <p:nvPr/>
+        </p:nvSpPr>
+        <p:spPr>
+          <a:xfrm>
+            <a:off x="868680" y="3840480"/>
+            <a:ext cx="4709160" cy="713232"/>
+          </a:xfrm>
+          <a:prstGeom prst="roundRect">
+            <a:avLst>
+              <a:gd name="adj" fmla="val 10256"/>
+            </a:avLst>
+          </a:prstGeom>
+          <a:solidFill>
+            <a:srgbClr val="FFFFFF"/>
+          </a:solidFill>
+          <a:ln w="12700">
+            <a:solidFill>
+              <a:srgbClr val="E5E7EB"/>
+            </a:solidFill>
+            <a:prstDash val="solid"/>
+          </a:ln>
+        </p:spPr>
+        <p:txBody>
+          <a:bodyPr/>
+          <a:lstStyle/>
+          <a:p>
+            <a:endParaRPr lang="en-US"/>
+          </a:p>
+        </p:txBody>
+      </p:sp>
+      <p:sp>
+        <p:nvSpPr>
+          <p:cNvPr id="16" name="Text 14">
+            <a:extLst>
+              <a:ext uri="{FF2B5EF4-FFF2-40B4-BE49-F238E27FC236}">
+                <a16:creationId xmlns:a16="http://schemas.microsoft.com/office/drawing/2014/main" id="{0FAB7E7D-AF78-8600-FA5B-93B96C48B046}"/>
+              </a:ext>
+            </a:extLst>
+          </p:cNvPr>
+          <p:cNvSpPr/>
+          <p:nvPr/>
+        </p:nvSpPr>
+        <p:spPr>
+          <a:xfrm>
+            <a:off x="1033272" y="3959352"/>
             <a:ext cx="4379976" cy="512064"/>
           </a:xfrm>
           <a:prstGeom prst="rect">
@@ -5971,6 +8073,104 @@
                   <a:srgbClr val="1F2937"/>
                 </a:solidFill>
               </a:rPr>
+              <a:t>Results</a:t>
+            </a:r>
+            <a:endParaRPr lang="en-US" sz="1380" dirty="0"/>
+          </a:p>
+          <a:p>
+            <a:pPr marL="0" indent="0" algn="l">
+              <a:buNone/>
+            </a:pPr>
+            <a:r>
+              <a:rPr lang="en-US" sz="1380" b="1" dirty="0">
+                <a:solidFill>
+                  <a:srgbClr val="1F2937"/>
+                </a:solidFill>
+              </a:rPr>
+              <a:t>Performance compared with baseline and observed error pattern</a:t>
+            </a:r>
+            <a:endParaRPr lang="en-US" sz="1380" dirty="0"/>
+          </a:p>
+        </p:txBody>
+      </p:sp>
+      <p:sp>
+        <p:nvSpPr>
+          <p:cNvPr id="17" name="Shape 15">
+            <a:extLst>
+              <a:ext uri="{FF2B5EF4-FFF2-40B4-BE49-F238E27FC236}">
+                <a16:creationId xmlns:a16="http://schemas.microsoft.com/office/drawing/2014/main" id="{9719395A-7E88-5D17-30EC-A319037D0071}"/>
+              </a:ext>
+            </a:extLst>
+          </p:cNvPr>
+          <p:cNvSpPr/>
+          <p:nvPr/>
+        </p:nvSpPr>
+        <p:spPr>
+          <a:xfrm>
+            <a:off x="6217920" y="3840480"/>
+            <a:ext cx="4709160" cy="713232"/>
+          </a:xfrm>
+          <a:prstGeom prst="roundRect">
+            <a:avLst>
+              <a:gd name="adj" fmla="val 10256"/>
+            </a:avLst>
+          </a:prstGeom>
+          <a:solidFill>
+            <a:srgbClr val="FFFFFF"/>
+          </a:solidFill>
+          <a:ln w="12700">
+            <a:solidFill>
+              <a:srgbClr val="E5E7EB"/>
+            </a:solidFill>
+            <a:prstDash val="solid"/>
+          </a:ln>
+        </p:spPr>
+        <p:txBody>
+          <a:bodyPr/>
+          <a:lstStyle/>
+          <a:p>
+            <a:endParaRPr lang="en-US"/>
+          </a:p>
+        </p:txBody>
+      </p:sp>
+      <p:sp>
+        <p:nvSpPr>
+          <p:cNvPr id="18" name="Text 16">
+            <a:extLst>
+              <a:ext uri="{FF2B5EF4-FFF2-40B4-BE49-F238E27FC236}">
+                <a16:creationId xmlns:a16="http://schemas.microsoft.com/office/drawing/2014/main" id="{6FF6905B-1C77-8D71-06CE-EB03FC6BFBC7}"/>
+              </a:ext>
+            </a:extLst>
+          </p:cNvPr>
+          <p:cNvSpPr/>
+          <p:nvPr/>
+        </p:nvSpPr>
+        <p:spPr>
+          <a:xfrm>
+            <a:off x="6382512" y="3959352"/>
+            <a:ext cx="4379976" cy="512064"/>
+          </a:xfrm>
+          <a:prstGeom prst="rect">
+            <a:avLst/>
+          </a:prstGeom>
+          <a:noFill/>
+          <a:ln/>
+        </p:spPr>
+        <p:txBody>
+          <a:bodyPr wrap="square" lIns="254" tIns="254" rIns="254" bIns="254" rtlCol="0" anchor="ctr">
+            <a:normAutofit fontScale="92500" lnSpcReduction="20000"/>
+          </a:bodyPr>
+          <a:lstStyle/>
+          <a:p>
+            <a:pPr marL="0" indent="0" algn="l">
+              <a:buNone/>
+            </a:pPr>
+            <a:r>
+              <a:rPr lang="en-US" sz="1380" b="1" dirty="0">
+                <a:solidFill>
+                  <a:srgbClr val="1F2937"/>
+                </a:solidFill>
+              </a:rPr>
               <a:t>Limitations</a:t>
             </a:r>
             <a:endParaRPr lang="en-US" sz="1380" dirty="0"/>
@@ -5993,7 +8193,13 @@
       </p:sp>
       <p:sp>
         <p:nvSpPr>
-          <p:cNvPr id="19" name="Text 17"/>
+          <p:cNvPr id="19" name="Text 17">
+            <a:extLst>
+              <a:ext uri="{FF2B5EF4-FFF2-40B4-BE49-F238E27FC236}">
+                <a16:creationId xmlns:a16="http://schemas.microsoft.com/office/drawing/2014/main" id="{B6FC2CFB-B864-902C-4787-50441E05328A}"/>
+              </a:ext>
+            </a:extLst>
+          </p:cNvPr>
           <p:cNvSpPr/>
           <p:nvPr/>
         </p:nvSpPr>
@@ -6028,6 +8234,11 @@
         </p:txBody>
       </p:sp>
     </p:spTree>
+    <p:extLst>
+      <p:ext uri="{BB962C8B-B14F-4D97-AF65-F5344CB8AC3E}">
+        <p14:creationId xmlns:p14="http://schemas.microsoft.com/office/powerpoint/2010/main" val="1949079996"/>
+      </p:ext>
+    </p:extLst>
   </p:cSld>
   <p:clrMapOvr>
     <a:masterClrMapping/>
@@ -6035,7 +8246,7 @@
 </p:sld>
 </file>
 
-<file path=ppt/slides/slide14.xml><?xml version="1.0" encoding="utf-8"?>
+<file path=ppt/slides/slide15.xml><?xml version="1.0" encoding="utf-8"?>
 <p:sld xmlns:a="http://schemas.openxmlformats.org/drawingml/2006/main" xmlns:r="http://schemas.openxmlformats.org/officeDocument/2006/relationships" xmlns:p="http://schemas.openxmlformats.org/presentationml/2006/main">
   <p:cSld name="Slide 15">
     <p:bg>
@@ -6902,7 +9113,7 @@
 </p:sld>
 </file>
 
-<file path=ppt/slides/slide15.xml><?xml version="1.0" encoding="utf-8"?>
+<file path=ppt/slides/slide16.xml><?xml version="1.0" encoding="utf-8"?>
 <p:sld xmlns:a="http://schemas.openxmlformats.org/drawingml/2006/main" xmlns:r="http://schemas.openxmlformats.org/officeDocument/2006/relationships" xmlns:p="http://schemas.openxmlformats.org/presentationml/2006/main">
   <p:cSld name="Slide 16">
     <p:bg>
